--- a/Warehouse slotting optimizer.pptx
+++ b/Warehouse slotting optimizer.pptx
@@ -12,25 +12,28 @@
     <p:sldId id="260" r:id="rId10"/>
     <p:sldId id="261" r:id="rId11"/>
     <p:sldId id="262" r:id="rId12"/>
+    <p:sldId id="263" r:id="rId13"/>
+    <p:sldId id="264" r:id="rId14"/>
+    <p:sldId id="265" r:id="rId15"/>
   </p:sldIdLst>
   <p:sldSz cx="18288000" cy="10287000"/>
   <p:notesSz cx="6858000" cy="9144000"/>
   <p:embeddedFontLst>
     <p:embeddedFont>
       <p:font typeface="Be Vietnam Ultra-Bold" charset="1" panose="00000900000000000000"/>
-      <p:regular r:id="rId13"/>
+      <p:regular r:id="rId16"/>
     </p:embeddedFont>
     <p:embeddedFont>
       <p:font typeface="Be Vietnam" charset="1" panose="00000500000000000000"/>
-      <p:regular r:id="rId14"/>
+      <p:regular r:id="rId17"/>
     </p:embeddedFont>
     <p:embeddedFont>
       <p:font typeface="Canva Sans" charset="1" panose="020B0503030501040103"/>
-      <p:regular r:id="rId15"/>
+      <p:regular r:id="rId18"/>
     </p:embeddedFont>
     <p:embeddedFont>
       <p:font typeface="Canva Sans Bold" charset="1" panose="020B0803030501040103"/>
-      <p:regular r:id="rId16"/>
+      <p:regular r:id="rId19"/>
     </p:embeddedFont>
   </p:embeddedFontLst>
   <p:defaultTextStyle>
@@ -3699,6 +3702,349 @@
 </p:sld>
 </file>
 
+<file path=ppt/slides/slide10.xml><?xml version="1.0" encoding="utf-8"?>
+<p:sld xmlns:p="http://schemas.openxmlformats.org/presentationml/2006/main" xmlns:a="http://schemas.openxmlformats.org/drawingml/2006/main" xmlns:r="http://schemas.openxmlformats.org/officeDocument/2006/relationships">
+  <p:cSld>
+    <p:bg>
+      <p:bgPr>
+        <a:solidFill>
+          <a:srgbClr val="DA7D51"/>
+        </a:solidFill>
+      </p:bgPr>
+    </p:bg>
+    <p:spTree>
+      <p:nvGrpSpPr>
+        <p:cNvPr id="1" name=""/>
+        <p:cNvGrpSpPr/>
+        <p:nvPr/>
+      </p:nvGrpSpPr>
+      <p:grpSpPr>
+        <a:xfrm>
+          <a:off x="0" y="0"/>
+          <a:ext cx="0" cy="0"/>
+          <a:chOff x="0" y="0"/>
+          <a:chExt cx="0" cy="0"/>
+        </a:xfrm>
+      </p:grpSpPr>
+      <p:sp>
+        <p:nvSpPr>
+          <p:cNvPr name="Freeform 2" id="2"/>
+          <p:cNvSpPr/>
+          <p:nvPr/>
+        </p:nvSpPr>
+        <p:spPr>
+          <a:xfrm flipH="false" flipV="false" rot="0">
+            <a:off x="3572525" y="3582329"/>
+            <a:ext cx="11142950" cy="6564210"/>
+          </a:xfrm>
+          <a:custGeom>
+            <a:avLst/>
+            <a:gdLst/>
+            <a:ahLst/>
+            <a:cxnLst/>
+            <a:rect r="r" b="b" t="t" l="l"/>
+            <a:pathLst>
+              <a:path h="6564210" w="11142950">
+                <a:moveTo>
+                  <a:pt x="0" y="0"/>
+                </a:moveTo>
+                <a:lnTo>
+                  <a:pt x="11142950" y="0"/>
+                </a:lnTo>
+                <a:lnTo>
+                  <a:pt x="11142950" y="6564211"/>
+                </a:lnTo>
+                <a:lnTo>
+                  <a:pt x="0" y="6564211"/>
+                </a:lnTo>
+                <a:lnTo>
+                  <a:pt x="0" y="0"/>
+                </a:lnTo>
+                <a:close/>
+              </a:path>
+            </a:pathLst>
+          </a:custGeom>
+          <a:blipFill>
+            <a:blip r:embed="rId2">
+              <a:extLst>
+                <a:ext uri="{96DAC541-7B7A-43D3-8B79-37D633B846F1}">
+                  <asvg:svgBlip xmlns:asvg="http://schemas.microsoft.com/office/drawing/2016/SVG/main" r:embed="rId3"/>
+                </a:ext>
+              </a:extLst>
+            </a:blip>
+            <a:stretch>
+              <a:fillRect l="0" t="0" r="0" b="0"/>
+            </a:stretch>
+          </a:blipFill>
+        </p:spPr>
+      </p:sp>
+      <p:sp>
+        <p:nvSpPr>
+          <p:cNvPr name="TextBox 3" id="3"/>
+          <p:cNvSpPr txBox="true"/>
+          <p:nvPr/>
+        </p:nvSpPr>
+        <p:spPr>
+          <a:xfrm rot="0">
+            <a:off x="4047486" y="1311574"/>
+            <a:ext cx="10193028" cy="1930830"/>
+          </a:xfrm>
+          <a:prstGeom prst="rect">
+            <a:avLst/>
+          </a:prstGeom>
+        </p:spPr>
+        <p:txBody>
+          <a:bodyPr anchor="t" rtlCol="false" tIns="0" lIns="0" bIns="0" rIns="0">
+            <a:spAutoFit/>
+          </a:bodyPr>
+          <a:lstStyle/>
+          <a:p>
+            <a:pPr algn="ctr">
+              <a:lnSpc>
+                <a:spcPts val="15404"/>
+              </a:lnSpc>
+            </a:pPr>
+            <a:r>
+              <a:rPr lang="en-US" b="true" sz="11941">
+                <a:solidFill>
+                  <a:srgbClr val="FFFFFF"/>
+                </a:solidFill>
+                <a:latin typeface="Be Vietnam Ultra-Bold"/>
+                <a:ea typeface="Be Vietnam Ultra-Bold"/>
+                <a:cs typeface="Be Vietnam Ultra-Bold"/>
+                <a:sym typeface="Be Vietnam Ultra-Bold"/>
+              </a:rPr>
+              <a:t>Thank You</a:t>
+            </a:r>
+          </a:p>
+        </p:txBody>
+      </p:sp>
+      <p:sp>
+        <p:nvSpPr>
+          <p:cNvPr name="Freeform 4" id="4"/>
+          <p:cNvSpPr/>
+          <p:nvPr/>
+        </p:nvSpPr>
+        <p:spPr>
+          <a:xfrm flipH="false" flipV="false" rot="0">
+            <a:off x="14407225" y="2926438"/>
+            <a:ext cx="2852075" cy="1254913"/>
+          </a:xfrm>
+          <a:custGeom>
+            <a:avLst/>
+            <a:gdLst/>
+            <a:ahLst/>
+            <a:cxnLst/>
+            <a:rect r="r" b="b" t="t" l="l"/>
+            <a:pathLst>
+              <a:path h="1254913" w="2852075">
+                <a:moveTo>
+                  <a:pt x="0" y="0"/>
+                </a:moveTo>
+                <a:lnTo>
+                  <a:pt x="2852075" y="0"/>
+                </a:lnTo>
+                <a:lnTo>
+                  <a:pt x="2852075" y="1254913"/>
+                </a:lnTo>
+                <a:lnTo>
+                  <a:pt x="0" y="1254913"/>
+                </a:lnTo>
+                <a:lnTo>
+                  <a:pt x="0" y="0"/>
+                </a:lnTo>
+                <a:close/>
+              </a:path>
+            </a:pathLst>
+          </a:custGeom>
+          <a:blipFill>
+            <a:blip r:embed="rId4">
+              <a:extLst>
+                <a:ext uri="{96DAC541-7B7A-43D3-8B79-37D633B846F1}">
+                  <asvg:svgBlip xmlns:asvg="http://schemas.microsoft.com/office/drawing/2016/SVG/main" r:embed="rId5"/>
+                </a:ext>
+              </a:extLst>
+            </a:blip>
+            <a:stretch>
+              <a:fillRect l="0" t="0" r="0" b="0"/>
+            </a:stretch>
+          </a:blipFill>
+        </p:spPr>
+      </p:sp>
+      <p:sp>
+        <p:nvSpPr>
+          <p:cNvPr name="Freeform 5" id="5"/>
+          <p:cNvSpPr/>
+          <p:nvPr/>
+        </p:nvSpPr>
+        <p:spPr>
+          <a:xfrm flipH="false" flipV="false" rot="0">
+            <a:off x="789116" y="5383836"/>
+            <a:ext cx="2852075" cy="1254913"/>
+          </a:xfrm>
+          <a:custGeom>
+            <a:avLst/>
+            <a:gdLst/>
+            <a:ahLst/>
+            <a:cxnLst/>
+            <a:rect r="r" b="b" t="t" l="l"/>
+            <a:pathLst>
+              <a:path h="1254913" w="2852075">
+                <a:moveTo>
+                  <a:pt x="0" y="0"/>
+                </a:moveTo>
+                <a:lnTo>
+                  <a:pt x="2852076" y="0"/>
+                </a:lnTo>
+                <a:lnTo>
+                  <a:pt x="2852076" y="1254913"/>
+                </a:lnTo>
+                <a:lnTo>
+                  <a:pt x="0" y="1254913"/>
+                </a:lnTo>
+                <a:lnTo>
+                  <a:pt x="0" y="0"/>
+                </a:lnTo>
+                <a:close/>
+              </a:path>
+            </a:pathLst>
+          </a:custGeom>
+          <a:blipFill>
+            <a:blip r:embed="rId4">
+              <a:extLst>
+                <a:ext uri="{96DAC541-7B7A-43D3-8B79-37D633B846F1}">
+                  <asvg:svgBlip xmlns:asvg="http://schemas.microsoft.com/office/drawing/2016/SVG/main" r:embed="rId5"/>
+                </a:ext>
+              </a:extLst>
+            </a:blip>
+            <a:stretch>
+              <a:fillRect l="0" t="0" r="0" b="0"/>
+            </a:stretch>
+          </a:blipFill>
+        </p:spPr>
+      </p:sp>
+      <p:sp>
+        <p:nvSpPr>
+          <p:cNvPr name="Freeform 6" id="6"/>
+          <p:cNvSpPr/>
+          <p:nvPr/>
+        </p:nvSpPr>
+        <p:spPr>
+          <a:xfrm flipH="false" flipV="false" rot="0">
+            <a:off x="2215154" y="2575547"/>
+            <a:ext cx="763618" cy="1276565"/>
+          </a:xfrm>
+          <a:custGeom>
+            <a:avLst/>
+            <a:gdLst/>
+            <a:ahLst/>
+            <a:cxnLst/>
+            <a:rect r="r" b="b" t="t" l="l"/>
+            <a:pathLst>
+              <a:path h="1276565" w="763618">
+                <a:moveTo>
+                  <a:pt x="0" y="0"/>
+                </a:moveTo>
+                <a:lnTo>
+                  <a:pt x="763618" y="0"/>
+                </a:lnTo>
+                <a:lnTo>
+                  <a:pt x="763618" y="1276565"/>
+                </a:lnTo>
+                <a:lnTo>
+                  <a:pt x="0" y="1276565"/>
+                </a:lnTo>
+                <a:lnTo>
+                  <a:pt x="0" y="0"/>
+                </a:lnTo>
+                <a:close/>
+              </a:path>
+            </a:pathLst>
+          </a:custGeom>
+          <a:blipFill>
+            <a:blip r:embed="rId6">
+              <a:extLst>
+                <a:ext uri="{96DAC541-7B7A-43D3-8B79-37D633B846F1}">
+                  <asvg:svgBlip xmlns:asvg="http://schemas.microsoft.com/office/drawing/2016/SVG/main" r:embed="rId7"/>
+                </a:ext>
+              </a:extLst>
+            </a:blip>
+            <a:stretch>
+              <a:fillRect l="0" t="0" r="0" b="0"/>
+            </a:stretch>
+          </a:blipFill>
+          <a:ln cap="sq">
+            <a:noFill/>
+            <a:prstDash val="solid"/>
+            <a:miter/>
+          </a:ln>
+        </p:spPr>
+      </p:sp>
+      <p:sp>
+        <p:nvSpPr>
+          <p:cNvPr name="Freeform 7" id="7"/>
+          <p:cNvSpPr/>
+          <p:nvPr/>
+        </p:nvSpPr>
+        <p:spPr>
+          <a:xfrm flipH="false" flipV="false" rot="0">
+            <a:off x="15586023" y="6834559"/>
+            <a:ext cx="763618" cy="1276565"/>
+          </a:xfrm>
+          <a:custGeom>
+            <a:avLst/>
+            <a:gdLst/>
+            <a:ahLst/>
+            <a:cxnLst/>
+            <a:rect r="r" b="b" t="t" l="l"/>
+            <a:pathLst>
+              <a:path h="1276565" w="763618">
+                <a:moveTo>
+                  <a:pt x="0" y="0"/>
+                </a:moveTo>
+                <a:lnTo>
+                  <a:pt x="763618" y="0"/>
+                </a:lnTo>
+                <a:lnTo>
+                  <a:pt x="763618" y="1276564"/>
+                </a:lnTo>
+                <a:lnTo>
+                  <a:pt x="0" y="1276564"/>
+                </a:lnTo>
+                <a:lnTo>
+                  <a:pt x="0" y="0"/>
+                </a:lnTo>
+                <a:close/>
+              </a:path>
+            </a:pathLst>
+          </a:custGeom>
+          <a:blipFill>
+            <a:blip r:embed="rId6">
+              <a:extLst>
+                <a:ext uri="{96DAC541-7B7A-43D3-8B79-37D633B846F1}">
+                  <asvg:svgBlip xmlns:asvg="http://schemas.microsoft.com/office/drawing/2016/SVG/main" r:embed="rId7"/>
+                </a:ext>
+              </a:extLst>
+            </a:blip>
+            <a:stretch>
+              <a:fillRect l="0" t="0" r="0" b="0"/>
+            </a:stretch>
+          </a:blipFill>
+          <a:ln cap="sq">
+            <a:noFill/>
+            <a:prstDash val="solid"/>
+            <a:miter/>
+          </a:ln>
+        </p:spPr>
+      </p:sp>
+    </p:spTree>
+  </p:cSld>
+  <p:clrMapOvr>
+    <a:masterClrMapping/>
+  </p:clrMapOvr>
+</p:sld>
+</file>
+
 <file path=ppt/slides/slide2.xml><?xml version="1.0" encoding="utf-8"?>
 <p:sld xmlns:p="http://schemas.openxmlformats.org/presentationml/2006/main" xmlns:a="http://schemas.openxmlformats.org/drawingml/2006/main" xmlns:r="http://schemas.openxmlformats.org/officeDocument/2006/relationships">
   <p:cSld>
@@ -4135,7 +4481,7 @@
                 <a:cs typeface="Be Vietnam Ultra-Bold"/>
                 <a:sym typeface="Be Vietnam Ultra-Bold"/>
               </a:rPr>
-              <a:t>01</a:t>
+              <a:t>02</a:t>
             </a:r>
           </a:p>
         </p:txBody>
@@ -4928,7 +5274,7 @@
                 <a:cs typeface="Be Vietnam Ultra-Bold"/>
                 <a:sym typeface="Be Vietnam Ultra-Bold"/>
               </a:rPr>
-              <a:t>02</a:t>
+              <a:t>03</a:t>
             </a:r>
           </a:p>
         </p:txBody>
@@ -5339,7 +5685,7 @@
                 <a:cs typeface="Be Vietnam Ultra-Bold"/>
                 <a:sym typeface="Be Vietnam Ultra-Bold"/>
               </a:rPr>
-              <a:t>03</a:t>
+              <a:t>04</a:t>
             </a:r>
           </a:p>
         </p:txBody>
@@ -5957,7 +6303,7 @@
                 <a:cs typeface="Be Vietnam Ultra-Bold"/>
                 <a:sym typeface="Be Vietnam Ultra-Bold"/>
               </a:rPr>
-              <a:t>04</a:t>
+              <a:t>05</a:t>
             </a:r>
           </a:p>
         </p:txBody>
@@ -6501,8 +6847,8 @@
         </p:nvSpPr>
         <p:spPr>
           <a:xfrm rot="0">
-            <a:off x="179415" y="2023192"/>
-            <a:ext cx="14998234" cy="8548145"/>
+            <a:off x="1028700" y="1972660"/>
+            <a:ext cx="14547029" cy="7763201"/>
           </a:xfrm>
           <a:prstGeom prst="rect">
             <a:avLst/>
@@ -6514,13 +6860,14 @@
           </a:bodyPr>
           <a:lstStyle/>
           <a:p>
-            <a:pPr algn="l">
+            <a:pPr algn="l" marL="563965" indent="-281983" lvl="1">
               <a:lnSpc>
-                <a:spcPts val="3442"/>
+                <a:spcPts val="3657"/>
               </a:lnSpc>
+              <a:buAutoNum type="arabicPeriod" startAt="1"/>
             </a:pPr>
             <a:r>
-              <a:rPr lang="en-US" sz="2458">
+              <a:rPr lang="en-US" sz="2612">
                 <a:solidFill>
                   <a:srgbClr val="000000"/>
                 </a:solidFill>
@@ -6529,17 +6876,18 @@
                 <a:cs typeface="Canva Sans"/>
                 <a:sym typeface="Canva Sans"/>
               </a:rPr>
-              <a:t>The Warehouse Slotting Optimizer uses a simple process to assign products</a:t>
-            </a:r>
-          </a:p>
-          <a:p>
-            <a:pPr algn="l">
+              <a:t>Data collection: Load sample or user-entered warehouse orders containing product names.</a:t>
+            </a:r>
+          </a:p>
+          <a:p>
+            <a:pPr algn="l" marL="563965" indent="-281983" lvl="1">
               <a:lnSpc>
-                <a:spcPts val="3442"/>
+                <a:spcPts val="3657"/>
               </a:lnSpc>
+              <a:buAutoNum type="arabicPeriod" startAt="1"/>
             </a:pPr>
             <a:r>
-              <a:rPr lang="en-US" sz="2458">
+              <a:rPr lang="en-US" sz="2612">
                 <a:solidFill>
                   <a:srgbClr val="000000"/>
                 </a:solidFill>
@@ -6548,38 +6896,10 @@
                 <a:cs typeface="Canva Sans"/>
                 <a:sym typeface="Canva Sans"/>
               </a:rPr>
-              <a:t> to the most suitable warehouse slots.</a:t>
-            </a:r>
-          </a:p>
-          <a:p>
-            <a:pPr algn="l">
-              <a:lnSpc>
-                <a:spcPts val="3442"/>
-              </a:lnSpc>
-            </a:pPr>
-            <a:r>
-              <a:rPr lang="en-US" sz="2458" b="true">
-                <a:solidFill>
-                  <a:srgbClr val="000000"/>
-                </a:solidFill>
-                <a:latin typeface="Canva Sans Bold"/>
-                <a:ea typeface="Canva Sans Bold"/>
-                <a:cs typeface="Canva Sans Bold"/>
-                <a:sym typeface="Canva Sans Bold"/>
-              </a:rPr>
-              <a:t>1. Collect Data</a:t>
-            </a:r>
-          </a:p>
-          <a:p>
-            <a:pPr algn="l" marL="530868" indent="-265434" lvl="1">
-              <a:lnSpc>
-                <a:spcPts val="3442"/>
-              </a:lnSpc>
-              <a:buFont typeface="Arial"/>
-              <a:buChar char="•"/>
-            </a:pPr>
-            <a:r>
-              <a:rPr lang="en-US" sz="2458">
+              <a:t>Data preprocessing: Extract unique product names and</a:t>
+            </a:r>
+            <a:r>
+              <a:rPr lang="en-US" sz="2612">
                 <a:solidFill>
                   <a:srgbClr val="000000"/>
                 </a:solidFill>
@@ -6588,19 +6908,10 @@
                 <a:cs typeface="Canva Sans"/>
                 <a:sym typeface="Canva Sans"/>
               </a:rPr>
-              <a:t>Product ID</a:t>
-            </a:r>
-          </a:p>
-          <a:p>
-            <a:pPr algn="l" marL="530868" indent="-265434" lvl="1">
-              <a:lnSpc>
-                <a:spcPts val="3442"/>
-              </a:lnSpc>
-              <a:buFont typeface="Arial"/>
-              <a:buChar char="•"/>
-            </a:pPr>
-            <a:r>
-              <a:rPr lang="en-US" sz="2458">
+              <a:t> </a:t>
+            </a:r>
+            <a:r>
+              <a:rPr lang="en-US" sz="2612">
                 <a:solidFill>
                   <a:srgbClr val="000000"/>
                 </a:solidFill>
@@ -6609,38 +6920,10 @@
                 <a:cs typeface="Canva Sans"/>
                 <a:sym typeface="Canva Sans"/>
               </a:rPr>
-              <a:t>Demand/Frequency</a:t>
-            </a:r>
-          </a:p>
-          <a:p>
-            <a:pPr algn="l">
-              <a:lnSpc>
-                <a:spcPts val="3442"/>
-              </a:lnSpc>
-            </a:pPr>
-            <a:r>
-              <a:rPr lang="en-US" sz="2458" b="true">
-                <a:solidFill>
-                  <a:srgbClr val="000000"/>
-                </a:solidFill>
-                <a:latin typeface="Canva Sans Bold"/>
-                <a:ea typeface="Canva Sans Bold"/>
-                <a:cs typeface="Canva Sans Bold"/>
-                <a:sym typeface="Canva Sans Bold"/>
-              </a:rPr>
-              <a:t>2. Store Data</a:t>
-            </a:r>
-          </a:p>
-          <a:p>
-            <a:pPr algn="l" marL="530868" indent="-265434" lvl="1">
-              <a:lnSpc>
-                <a:spcPts val="3442"/>
-              </a:lnSpc>
-              <a:buFont typeface="Arial"/>
-              <a:buChar char="•"/>
-            </a:pPr>
-            <a:r>
-              <a:rPr lang="en-US" sz="2458">
+              <a:t>ca</a:t>
+            </a:r>
+            <a:r>
+              <a:rPr lang="en-US" sz="2612">
                 <a:solidFill>
                   <a:srgbClr val="000000"/>
                 </a:solidFill>
@@ -6649,19 +6932,10 @@
                 <a:cs typeface="Canva Sans"/>
                 <a:sym typeface="Canva Sans"/>
               </a:rPr>
-              <a:t>ArrayList → Product &amp; slot details</a:t>
-            </a:r>
-          </a:p>
-          <a:p>
-            <a:pPr algn="l" marL="530868" indent="-265434" lvl="1">
-              <a:lnSpc>
-                <a:spcPts val="3442"/>
-              </a:lnSpc>
-              <a:buFont typeface="Arial"/>
-              <a:buChar char="•"/>
-            </a:pPr>
-            <a:r>
-              <a:rPr lang="en-US" sz="2458">
+              <a:t>lc</a:t>
+            </a:r>
+            <a:r>
+              <a:rPr lang="en-US" sz="2612">
                 <a:solidFill>
                   <a:srgbClr val="000000"/>
                 </a:solidFill>
@@ -6670,19 +6944,10 @@
                 <a:cs typeface="Canva Sans"/>
                 <a:sym typeface="Canva Sans"/>
               </a:rPr>
-              <a:t>HashMap → Fast product lookup</a:t>
-            </a:r>
-          </a:p>
-          <a:p>
-            <a:pPr algn="l" marL="530868" indent="-265434" lvl="1">
-              <a:lnSpc>
-                <a:spcPts val="3442"/>
-              </a:lnSpc>
-              <a:buFont typeface="Arial"/>
-              <a:buChar char="•"/>
-            </a:pPr>
-            <a:r>
-              <a:rPr lang="en-US" sz="2458">
+              <a:t>ul</a:t>
+            </a:r>
+            <a:r>
+              <a:rPr lang="en-US" sz="2612">
                 <a:solidFill>
                   <a:srgbClr val="000000"/>
                 </a:solidFill>
@@ -6691,36 +6956,10 @@
                 <a:cs typeface="Canva Sans"/>
                 <a:sym typeface="Canva Sans"/>
               </a:rPr>
-              <a:t>PriorityQueue → Product priority</a:t>
-            </a:r>
-          </a:p>
-          <a:p>
-            <a:pPr algn="l">
-              <a:lnSpc>
-                <a:spcPts val="3442"/>
-              </a:lnSpc>
-            </a:pPr>
-            <a:r>
-              <a:rPr lang="en-US" sz="2458" b="true">
-                <a:solidFill>
-                  <a:srgbClr val="000000"/>
-                </a:solidFill>
-                <a:latin typeface="Canva Sans Bold"/>
-                <a:ea typeface="Canva Sans Bold"/>
-                <a:cs typeface="Canva Sans Bold"/>
-                <a:sym typeface="Canva Sans Bold"/>
-              </a:rPr>
-              <a:t>3. Calculate Priority</a:t>
-            </a:r>
-          </a:p>
-          <a:p>
-            <a:pPr algn="l">
-              <a:lnSpc>
-                <a:spcPts val="3442"/>
-              </a:lnSpc>
-            </a:pPr>
-            <a:r>
-              <a:rPr lang="en-US" sz="2458">
+              <a:t>at</a:t>
+            </a:r>
+            <a:r>
+              <a:rPr lang="en-US" sz="2612">
                 <a:solidFill>
                   <a:srgbClr val="000000"/>
                 </a:solidFill>
@@ -6729,36 +6968,10 @@
                 <a:cs typeface="Canva Sans"/>
                 <a:sym typeface="Canva Sans"/>
               </a:rPr>
-              <a:t>Products are ranked based on demand and picking frequency.</a:t>
-            </a:r>
-          </a:p>
-          <a:p>
-            <a:pPr algn="l">
-              <a:lnSpc>
-                <a:spcPts val="3442"/>
-              </a:lnSpc>
-            </a:pPr>
-            <a:r>
-              <a:rPr lang="en-US" sz="2458" b="true">
-                <a:solidFill>
-                  <a:srgbClr val="000000"/>
-                </a:solidFill>
-                <a:latin typeface="Canva Sans Bold"/>
-                <a:ea typeface="Canva Sans Bold"/>
-                <a:cs typeface="Canva Sans Bold"/>
-                <a:sym typeface="Canva Sans Bold"/>
-              </a:rPr>
-              <a:t>4. Sort Products</a:t>
-            </a:r>
-          </a:p>
-          <a:p>
-            <a:pPr algn="l">
-              <a:lnSpc>
-                <a:spcPts val="3442"/>
-              </a:lnSpc>
-            </a:pPr>
-            <a:r>
-              <a:rPr lang="en-US" sz="2458">
+              <a:t>e product frequencies</a:t>
+            </a:r>
+            <a:r>
+              <a:rPr lang="en-US" sz="2612">
                 <a:solidFill>
                   <a:srgbClr val="000000"/>
                 </a:solidFill>
@@ -6767,17 +6980,10 @@
                 <a:cs typeface="Canva Sans"/>
                 <a:sym typeface="Canva Sans"/>
               </a:rPr>
-              <a:t>Products are arranged from highest to lowest demand.</a:t>
-            </a:r>
-          </a:p>
-          <a:p>
-            <a:pPr algn="l">
-              <a:lnSpc>
-                <a:spcPts val="3442"/>
-              </a:lnSpc>
-            </a:pPr>
-            <a:r>
-              <a:rPr lang="en-US" sz="2458">
+              <a:t> </a:t>
+            </a:r>
+            <a:r>
+              <a:rPr lang="en-US" sz="2612">
                 <a:solidFill>
                   <a:srgbClr val="000000"/>
                 </a:solidFill>
@@ -6786,29 +6992,10 @@
                 <a:cs typeface="Canva Sans"/>
                 <a:sym typeface="Canva Sans"/>
               </a:rPr>
-              <a:t>5. </a:t>
-            </a:r>
-            <a:r>
-              <a:rPr lang="en-US" sz="2458" b="true">
-                <a:solidFill>
-                  <a:srgbClr val="000000"/>
-                </a:solidFill>
-                <a:latin typeface="Canva Sans Bold"/>
-                <a:ea typeface="Canva Sans Bold"/>
-                <a:cs typeface="Canva Sans Bold"/>
-                <a:sym typeface="Canva Sans Bold"/>
-              </a:rPr>
-              <a:t>Assign Slots</a:t>
-            </a:r>
-          </a:p>
-          <a:p>
-            <a:pPr algn="l">
-              <a:lnSpc>
-                <a:spcPts val="3442"/>
-              </a:lnSpc>
-            </a:pPr>
-            <a:r>
-              <a:rPr lang="en-US" sz="2458">
+              <a:t>and c</a:t>
+            </a:r>
+            <a:r>
+              <a:rPr lang="en-US" sz="2612">
                 <a:solidFill>
                   <a:srgbClr val="000000"/>
                 </a:solidFill>
@@ -6817,36 +7004,10 @@
                 <a:cs typeface="Canva Sans"/>
                 <a:sym typeface="Canva Sans"/>
               </a:rPr>
-              <a:t>High-priority products are assigned to easily accessible</a:t>
-            </a:r>
-          </a:p>
-          <a:p>
-            <a:pPr algn="l">
-              <a:lnSpc>
-                <a:spcPts val="3442"/>
-              </a:lnSpc>
-            </a:pPr>
-            <a:r>
-              <a:rPr lang="en-US" sz="2458" b="true">
-                <a:solidFill>
-                  <a:srgbClr val="000000"/>
-                </a:solidFill>
-                <a:latin typeface="Canva Sans Bold"/>
-                <a:ea typeface="Canva Sans Bold"/>
-                <a:cs typeface="Canva Sans Bold"/>
-                <a:sym typeface="Canva Sans Bold"/>
-              </a:rPr>
-              <a:t>6. Calculate Distance</a:t>
-            </a:r>
-          </a:p>
-          <a:p>
-            <a:pPr algn="l">
-              <a:lnSpc>
-                <a:spcPts val="3442"/>
-              </a:lnSpc>
-            </a:pPr>
-            <a:r>
-              <a:rPr lang="en-US" sz="2458">
+              <a:t>o</a:t>
+            </a:r>
+            <a:r>
+              <a:rPr lang="en-US" sz="2612">
                 <a:solidFill>
                   <a:srgbClr val="000000"/>
                 </a:solidFill>
@@ -6855,36 +7016,10 @@
                 <a:cs typeface="Canva Sans"/>
                 <a:sym typeface="Canva Sans"/>
               </a:rPr>
-              <a:t>Estimate picker travel distance and retrieval time.</a:t>
-            </a:r>
-          </a:p>
-          <a:p>
-            <a:pPr algn="l">
-              <a:lnSpc>
-                <a:spcPts val="3442"/>
-              </a:lnSpc>
-            </a:pPr>
-            <a:r>
-              <a:rPr lang="en-US" sz="2458" b="true">
-                <a:solidFill>
-                  <a:srgbClr val="000000"/>
-                </a:solidFill>
-                <a:latin typeface="Canva Sans Bold"/>
-                <a:ea typeface="Canva Sans Bold"/>
-                <a:cs typeface="Canva Sans Bold"/>
-                <a:sym typeface="Canva Sans Bold"/>
-              </a:rPr>
-              <a:t>7. Optimize Layout</a:t>
-            </a:r>
-          </a:p>
-          <a:p>
-            <a:pPr algn="l">
-              <a:lnSpc>
-                <a:spcPts val="3442"/>
-              </a:lnSpc>
-            </a:pPr>
-            <a:r>
-              <a:rPr lang="en-US" sz="2458">
+              <a:t>-occur</a:t>
+            </a:r>
+            <a:r>
+              <a:rPr lang="en-US" sz="2612">
                 <a:solidFill>
                   <a:srgbClr val="000000"/>
                 </a:solidFill>
@@ -6893,17 +7028,858 @@
                 <a:cs typeface="Canva Sans"/>
                 <a:sym typeface="Canva Sans"/>
               </a:rPr>
-              <a:t>Generate the final optimized warehouse slot arrangement.</a:t>
-            </a:r>
-          </a:p>
-          <a:p>
-            <a:pPr algn="l">
+              <a:t>re</a:t>
+            </a:r>
+            <a:r>
+              <a:rPr lang="en-US" sz="2612">
+                <a:solidFill>
+                  <a:srgbClr val="000000"/>
+                </a:solidFill>
+                <a:latin typeface="Canva Sans"/>
+                <a:ea typeface="Canva Sans"/>
+                <a:cs typeface="Canva Sans"/>
+                <a:sym typeface="Canva Sans"/>
+              </a:rPr>
+              <a:t>nce</a:t>
+            </a:r>
+            <a:r>
+              <a:rPr lang="en-US" sz="2612">
+                <a:solidFill>
+                  <a:srgbClr val="000000"/>
+                </a:solidFill>
+                <a:latin typeface="Canva Sans"/>
+                <a:ea typeface="Canva Sans"/>
+                <a:cs typeface="Canva Sans"/>
+                <a:sym typeface="Canva Sans"/>
+              </a:rPr>
+              <a:t> </a:t>
+            </a:r>
+            <a:r>
+              <a:rPr lang="en-US" sz="2612">
+                <a:solidFill>
+                  <a:srgbClr val="000000"/>
+                </a:solidFill>
+                <a:latin typeface="Canva Sans"/>
+                <a:ea typeface="Canva Sans"/>
+                <a:cs typeface="Canva Sans"/>
+                <a:sym typeface="Canva Sans"/>
+              </a:rPr>
+              <a:t>coun</a:t>
+            </a:r>
+            <a:r>
+              <a:rPr lang="en-US" sz="2612">
+                <a:solidFill>
+                  <a:srgbClr val="000000"/>
+                </a:solidFill>
+                <a:latin typeface="Canva Sans"/>
+                <a:ea typeface="Canva Sans"/>
+                <a:cs typeface="Canva Sans"/>
+                <a:sym typeface="Canva Sans"/>
+              </a:rPr>
+              <a:t>t</a:t>
+            </a:r>
+            <a:r>
+              <a:rPr lang="en-US" sz="2612">
+                <a:solidFill>
+                  <a:srgbClr val="000000"/>
+                </a:solidFill>
+                <a:latin typeface="Canva Sans"/>
+                <a:ea typeface="Canva Sans"/>
+                <a:cs typeface="Canva Sans"/>
+                <a:sym typeface="Canva Sans"/>
+              </a:rPr>
+              <a:t>s.</a:t>
+            </a:r>
+          </a:p>
+          <a:p>
+            <a:pPr algn="l" marL="563965" indent="-281983" lvl="1">
               <a:lnSpc>
-                <a:spcPts val="3442"/>
+                <a:spcPts val="3657"/>
+              </a:lnSpc>
+              <a:buAutoNum type="arabicPeriod" startAt="1"/>
+            </a:pPr>
+            <a:r>
+              <a:rPr lang="en-US" sz="2612">
+                <a:solidFill>
+                  <a:srgbClr val="000000"/>
+                </a:solidFill>
+                <a:latin typeface="Canva Sans"/>
+                <a:ea typeface="Canva Sans"/>
+                <a:cs typeface="Canva Sans"/>
+                <a:sym typeface="Canva Sans"/>
+              </a:rPr>
+              <a:t>W</a:t>
+            </a:r>
+            <a:r>
+              <a:rPr lang="en-US" sz="2612">
+                <a:solidFill>
+                  <a:srgbClr val="000000"/>
+                </a:solidFill>
+                <a:latin typeface="Canva Sans"/>
+                <a:ea typeface="Canva Sans"/>
+                <a:cs typeface="Canva Sans"/>
+                <a:sym typeface="Canva Sans"/>
+              </a:rPr>
+              <a:t>arehouse modelling: Represent the warehouse as an 8 × 6 grid with fixed product locations and a designated door.</a:t>
+            </a:r>
+          </a:p>
+          <a:p>
+            <a:pPr algn="l" marL="563965" indent="-281983" lvl="1">
+              <a:lnSpc>
+                <a:spcPts val="3657"/>
+              </a:lnSpc>
+              <a:buAutoNum type="arabicPeriod" startAt="1"/>
+            </a:pPr>
+            <a:r>
+              <a:rPr lang="en-US" sz="2612">
+                <a:solidFill>
+                  <a:srgbClr val="000000"/>
+                </a:solidFill>
+                <a:latin typeface="Canva Sans"/>
+                <a:ea typeface="Canva Sans"/>
+                <a:cs typeface="Canva Sans"/>
+                <a:sym typeface="Canva Sans"/>
+              </a:rPr>
+              <a:t>Distance</a:t>
+            </a:r>
+            <a:r>
+              <a:rPr lang="en-US" sz="2612">
+                <a:solidFill>
+                  <a:srgbClr val="000000"/>
+                </a:solidFill>
+                <a:latin typeface="Canva Sans"/>
+                <a:ea typeface="Canva Sans"/>
+                <a:cs typeface="Canva Sans"/>
+                <a:sym typeface="Canva Sans"/>
+              </a:rPr>
+              <a:t> </a:t>
+            </a:r>
+            <a:r>
+              <a:rPr lang="en-US" sz="2612">
+                <a:solidFill>
+                  <a:srgbClr val="000000"/>
+                </a:solidFill>
+                <a:latin typeface="Canva Sans"/>
+                <a:ea typeface="Canva Sans"/>
+                <a:cs typeface="Canva Sans"/>
+                <a:sym typeface="Canva Sans"/>
+              </a:rPr>
+              <a:t>c</a:t>
+            </a:r>
+            <a:r>
+              <a:rPr lang="en-US" sz="2612">
+                <a:solidFill>
+                  <a:srgbClr val="000000"/>
+                </a:solidFill>
+                <a:latin typeface="Canva Sans"/>
+                <a:ea typeface="Canva Sans"/>
+                <a:cs typeface="Canva Sans"/>
+                <a:sym typeface="Canva Sans"/>
+              </a:rPr>
+              <a:t>alculat</a:t>
+            </a:r>
+            <a:r>
+              <a:rPr lang="en-US" sz="2612">
+                <a:solidFill>
+                  <a:srgbClr val="000000"/>
+                </a:solidFill>
+                <a:latin typeface="Canva Sans"/>
+                <a:ea typeface="Canva Sans"/>
+                <a:cs typeface="Canva Sans"/>
+                <a:sym typeface="Canva Sans"/>
+              </a:rPr>
+              <a:t>ion: Us</a:t>
+            </a:r>
+            <a:r>
+              <a:rPr lang="en-US" sz="2612">
+                <a:solidFill>
+                  <a:srgbClr val="000000"/>
+                </a:solidFill>
+                <a:latin typeface="Canva Sans"/>
+                <a:ea typeface="Canva Sans"/>
+                <a:cs typeface="Canva Sans"/>
+                <a:sym typeface="Canva Sans"/>
+              </a:rPr>
+              <a:t>e </a:t>
+            </a:r>
+            <a:r>
+              <a:rPr lang="en-US" sz="2612">
+                <a:solidFill>
+                  <a:srgbClr val="000000"/>
+                </a:solidFill>
+                <a:latin typeface="Canva Sans"/>
+                <a:ea typeface="Canva Sans"/>
+                <a:cs typeface="Canva Sans"/>
+                <a:sym typeface="Canva Sans"/>
+              </a:rPr>
+              <a:t>Manhattan d</a:t>
+            </a:r>
+            <a:r>
+              <a:rPr lang="en-US" sz="2612">
+                <a:solidFill>
+                  <a:srgbClr val="000000"/>
+                </a:solidFill>
+                <a:latin typeface="Canva Sans"/>
+                <a:ea typeface="Canva Sans"/>
+                <a:cs typeface="Canva Sans"/>
+                <a:sym typeface="Canva Sans"/>
+              </a:rPr>
+              <a:t>i</a:t>
+            </a:r>
+            <a:r>
+              <a:rPr lang="en-US" sz="2612">
+                <a:solidFill>
+                  <a:srgbClr val="000000"/>
+                </a:solidFill>
+                <a:latin typeface="Canva Sans"/>
+                <a:ea typeface="Canva Sans"/>
+                <a:cs typeface="Canva Sans"/>
+                <a:sym typeface="Canva Sans"/>
+              </a:rPr>
+              <a:t>s</a:t>
+            </a:r>
+            <a:r>
+              <a:rPr lang="en-US" sz="2612">
+                <a:solidFill>
+                  <a:srgbClr val="000000"/>
+                </a:solidFill>
+                <a:latin typeface="Canva Sans"/>
+                <a:ea typeface="Canva Sans"/>
+                <a:cs typeface="Canva Sans"/>
+                <a:sym typeface="Canva Sans"/>
+              </a:rPr>
+              <a:t>t</a:t>
+            </a:r>
+            <a:r>
+              <a:rPr lang="en-US" sz="2612">
+                <a:solidFill>
+                  <a:srgbClr val="000000"/>
+                </a:solidFill>
+                <a:latin typeface="Canva Sans"/>
+                <a:ea typeface="Canva Sans"/>
+                <a:cs typeface="Canva Sans"/>
+                <a:sym typeface="Canva Sans"/>
+              </a:rPr>
+              <a:t>ance to estimate travel between locations.</a:t>
+            </a:r>
+          </a:p>
+          <a:p>
+            <a:pPr algn="l" marL="563965" indent="-281983" lvl="1">
+              <a:lnSpc>
+                <a:spcPts val="3657"/>
+              </a:lnSpc>
+              <a:buAutoNum type="arabicPeriod" startAt="1"/>
+            </a:pPr>
+            <a:r>
+              <a:rPr lang="en-US" sz="2612">
+                <a:solidFill>
+                  <a:srgbClr val="000000"/>
+                </a:solidFill>
+                <a:latin typeface="Canva Sans"/>
+                <a:ea typeface="Canva Sans"/>
+                <a:cs typeface="Canva Sans"/>
+                <a:sym typeface="Canva Sans"/>
+              </a:rPr>
+              <a:t>Route optimization: Apply bitmask DP to find the exact shortest picking tour for the selec</a:t>
+            </a:r>
+            <a:r>
+              <a:rPr lang="en-US" sz="2612">
+                <a:solidFill>
+                  <a:srgbClr val="000000"/>
+                </a:solidFill>
+                <a:latin typeface="Canva Sans"/>
+                <a:ea typeface="Canva Sans"/>
+                <a:cs typeface="Canva Sans"/>
+                <a:sym typeface="Canva Sans"/>
+              </a:rPr>
+              <a:t>t</a:t>
+            </a:r>
+            <a:r>
+              <a:rPr lang="en-US" sz="2612">
+                <a:solidFill>
+                  <a:srgbClr val="000000"/>
+                </a:solidFill>
+                <a:latin typeface="Canva Sans"/>
+                <a:ea typeface="Canva Sans"/>
+                <a:cs typeface="Canva Sans"/>
+                <a:sym typeface="Canva Sans"/>
+              </a:rPr>
+              <a:t>ed</a:t>
+            </a:r>
+            <a:r>
+              <a:rPr lang="en-US" sz="2612">
+                <a:solidFill>
+                  <a:srgbClr val="000000"/>
+                </a:solidFill>
+                <a:latin typeface="Canva Sans"/>
+                <a:ea typeface="Canva Sans"/>
+                <a:cs typeface="Canva Sans"/>
+                <a:sym typeface="Canva Sans"/>
+              </a:rPr>
+              <a:t> </a:t>
+            </a:r>
+            <a:r>
+              <a:rPr lang="en-US" sz="2612">
+                <a:solidFill>
+                  <a:srgbClr val="000000"/>
+                </a:solidFill>
+                <a:latin typeface="Canva Sans"/>
+                <a:ea typeface="Canva Sans"/>
+                <a:cs typeface="Canva Sans"/>
+                <a:sym typeface="Canva Sans"/>
+              </a:rPr>
+              <a:t>p</a:t>
+            </a:r>
+            <a:r>
+              <a:rPr lang="en-US" sz="2612">
+                <a:solidFill>
+                  <a:srgbClr val="000000"/>
+                </a:solidFill>
+                <a:latin typeface="Canva Sans"/>
+                <a:ea typeface="Canva Sans"/>
+                <a:cs typeface="Canva Sans"/>
+                <a:sym typeface="Canva Sans"/>
+              </a:rPr>
+              <a:t>roducts</a:t>
+            </a:r>
+            <a:r>
+              <a:rPr lang="en-US" sz="2612">
+                <a:solidFill>
+                  <a:srgbClr val="000000"/>
+                </a:solidFill>
+                <a:latin typeface="Canva Sans"/>
+                <a:ea typeface="Canva Sans"/>
+                <a:cs typeface="Canva Sans"/>
+                <a:sym typeface="Canva Sans"/>
+              </a:rPr>
+              <a:t>.</a:t>
+            </a:r>
+          </a:p>
+          <a:p>
+            <a:pPr algn="l" marL="563965" indent="-281983" lvl="1">
+              <a:lnSpc>
+                <a:spcPts val="3657"/>
+              </a:lnSpc>
+              <a:buAutoNum type="arabicPeriod" startAt="1"/>
+            </a:pPr>
+            <a:r>
+              <a:rPr lang="en-US" sz="2612">
+                <a:solidFill>
+                  <a:srgbClr val="000000"/>
+                </a:solidFill>
+                <a:latin typeface="Canva Sans"/>
+                <a:ea typeface="Canva Sans"/>
+                <a:cs typeface="Canva Sans"/>
+                <a:sym typeface="Canva Sans"/>
+              </a:rPr>
+              <a:t>Baseline </a:t>
+            </a:r>
+            <a:r>
+              <a:rPr lang="en-US" sz="2612">
+                <a:solidFill>
+                  <a:srgbClr val="000000"/>
+                </a:solidFill>
+                <a:latin typeface="Canva Sans"/>
+                <a:ea typeface="Canva Sans"/>
+                <a:cs typeface="Canva Sans"/>
+                <a:sym typeface="Canva Sans"/>
+              </a:rPr>
+              <a:t>comparison: Apply Nearest Neighbour to generate a faster heuristic route for comparison.</a:t>
+            </a:r>
+          </a:p>
+          <a:p>
+            <a:pPr algn="l" marL="563965" indent="-281983" lvl="1">
+              <a:lnSpc>
+                <a:spcPts val="3657"/>
+              </a:lnSpc>
+              <a:buAutoNum type="arabicPeriod" startAt="1"/>
+            </a:pPr>
+            <a:r>
+              <a:rPr lang="en-US" sz="2612">
+                <a:solidFill>
+                  <a:srgbClr val="000000"/>
+                </a:solidFill>
+                <a:latin typeface="Canva Sans"/>
+                <a:ea typeface="Canva Sans"/>
+                <a:cs typeface="Canva Sans"/>
+                <a:sym typeface="Canva Sans"/>
+              </a:rPr>
+              <a:t>A</a:t>
+            </a:r>
+            <a:r>
+              <a:rPr lang="en-US" sz="2612">
+                <a:solidFill>
+                  <a:srgbClr val="000000"/>
+                </a:solidFill>
+                <a:latin typeface="Canva Sans"/>
+                <a:ea typeface="Canva Sans"/>
+                <a:cs typeface="Canva Sans"/>
+                <a:sym typeface="Canva Sans"/>
+              </a:rPr>
+              <a:t>dd</a:t>
+            </a:r>
+            <a:r>
+              <a:rPr lang="en-US" sz="2612">
+                <a:solidFill>
+                  <a:srgbClr val="000000"/>
+                </a:solidFill>
+                <a:latin typeface="Canva Sans"/>
+                <a:ea typeface="Canva Sans"/>
+                <a:cs typeface="Canva Sans"/>
+                <a:sym typeface="Canva Sans"/>
+              </a:rPr>
+              <a:t>i</a:t>
+            </a:r>
+            <a:r>
+              <a:rPr lang="en-US" sz="2612">
+                <a:solidFill>
+                  <a:srgbClr val="000000"/>
+                </a:solidFill>
+                <a:latin typeface="Canva Sans"/>
+                <a:ea typeface="Canva Sans"/>
+                <a:cs typeface="Canva Sans"/>
+                <a:sym typeface="Canva Sans"/>
+              </a:rPr>
+              <a:t>tio</a:t>
+            </a:r>
+            <a:r>
+              <a:rPr lang="en-US" sz="2612">
+                <a:solidFill>
+                  <a:srgbClr val="000000"/>
+                </a:solidFill>
+                <a:latin typeface="Canva Sans"/>
+                <a:ea typeface="Canva Sans"/>
+                <a:cs typeface="Canva Sans"/>
+                <a:sym typeface="Canva Sans"/>
+              </a:rPr>
+              <a:t>n</a:t>
+            </a:r>
+            <a:r>
+              <a:rPr lang="en-US" sz="2612">
+                <a:solidFill>
+                  <a:srgbClr val="000000"/>
+                </a:solidFill>
+                <a:latin typeface="Canva Sans"/>
+                <a:ea typeface="Canva Sans"/>
+                <a:cs typeface="Canva Sans"/>
+                <a:sym typeface="Canva Sans"/>
+              </a:rPr>
+              <a:t>al</a:t>
+            </a:r>
+            <a:r>
+              <a:rPr lang="en-US" sz="2612">
+                <a:solidFill>
+                  <a:srgbClr val="000000"/>
+                </a:solidFill>
+                <a:latin typeface="Canva Sans"/>
+                <a:ea typeface="Canva Sans"/>
+                <a:cs typeface="Canva Sans"/>
+                <a:sym typeface="Canva Sans"/>
+              </a:rPr>
+              <a:t> </a:t>
+            </a:r>
+            <a:r>
+              <a:rPr lang="en-US" sz="2612">
+                <a:solidFill>
+                  <a:srgbClr val="000000"/>
+                </a:solidFill>
+                <a:latin typeface="Canva Sans"/>
+                <a:ea typeface="Canva Sans"/>
+                <a:cs typeface="Canva Sans"/>
+                <a:sym typeface="Canva Sans"/>
+              </a:rPr>
+              <a:t>a</a:t>
+            </a:r>
+            <a:r>
+              <a:rPr lang="en-US" sz="2612">
+                <a:solidFill>
+                  <a:srgbClr val="000000"/>
+                </a:solidFill>
+                <a:latin typeface="Canva Sans"/>
+                <a:ea typeface="Canva Sans"/>
+                <a:cs typeface="Canva Sans"/>
+                <a:sym typeface="Canva Sans"/>
+              </a:rPr>
+              <a:t>l</a:t>
+            </a:r>
+            <a:r>
+              <a:rPr lang="en-US" sz="2612">
+                <a:solidFill>
+                  <a:srgbClr val="000000"/>
+                </a:solidFill>
+                <a:latin typeface="Canva Sans"/>
+                <a:ea typeface="Canva Sans"/>
+                <a:cs typeface="Canva Sans"/>
+                <a:sym typeface="Canva Sans"/>
+              </a:rPr>
+              <a:t>gorithm demonstrations: Use Rabin–Karp for string searching, Edmonds–Karp</a:t>
+            </a:r>
+            <a:r>
+              <a:rPr lang="en-US" sz="2612">
+                <a:solidFill>
+                  <a:srgbClr val="000000"/>
+                </a:solidFill>
+                <a:latin typeface="Canva Sans"/>
+                <a:ea typeface="Canva Sans"/>
+                <a:cs typeface="Canva Sans"/>
+                <a:sym typeface="Canva Sans"/>
+              </a:rPr>
+              <a:t> </a:t>
+            </a:r>
+            <a:r>
+              <a:rPr lang="en-US" sz="2612">
+                <a:solidFill>
+                  <a:srgbClr val="000000"/>
+                </a:solidFill>
+                <a:latin typeface="Canva Sans"/>
+                <a:ea typeface="Canva Sans"/>
+                <a:cs typeface="Canva Sans"/>
+                <a:sym typeface="Canva Sans"/>
+              </a:rPr>
+              <a:t>for m</a:t>
+            </a:r>
+            <a:r>
+              <a:rPr lang="en-US" sz="2612">
+                <a:solidFill>
+                  <a:srgbClr val="000000"/>
+                </a:solidFill>
+                <a:latin typeface="Canva Sans"/>
+                <a:ea typeface="Canva Sans"/>
+                <a:cs typeface="Canva Sans"/>
+                <a:sym typeface="Canva Sans"/>
+              </a:rPr>
+              <a:t>a</a:t>
+            </a:r>
+            <a:r>
+              <a:rPr lang="en-US" sz="2612">
+                <a:solidFill>
+                  <a:srgbClr val="000000"/>
+                </a:solidFill>
+                <a:latin typeface="Canva Sans"/>
+                <a:ea typeface="Canva Sans"/>
+                <a:cs typeface="Canva Sans"/>
+                <a:sym typeface="Canva Sans"/>
+              </a:rPr>
+              <a:t>xim</a:t>
+            </a:r>
+            <a:r>
+              <a:rPr lang="en-US" sz="2612">
+                <a:solidFill>
+                  <a:srgbClr val="000000"/>
+                </a:solidFill>
+                <a:latin typeface="Canva Sans"/>
+                <a:ea typeface="Canva Sans"/>
+                <a:cs typeface="Canva Sans"/>
+                <a:sym typeface="Canva Sans"/>
+              </a:rPr>
+              <a:t>u</a:t>
+            </a:r>
+            <a:r>
+              <a:rPr lang="en-US" sz="2612">
+                <a:solidFill>
+                  <a:srgbClr val="000000"/>
+                </a:solidFill>
+                <a:latin typeface="Canva Sans"/>
+                <a:ea typeface="Canva Sans"/>
+                <a:cs typeface="Canva Sans"/>
+                <a:sym typeface="Canva Sans"/>
+              </a:rPr>
+              <a:t>m f</a:t>
+            </a:r>
+            <a:r>
+              <a:rPr lang="en-US" sz="2612">
+                <a:solidFill>
+                  <a:srgbClr val="000000"/>
+                </a:solidFill>
+                <a:latin typeface="Canva Sans"/>
+                <a:ea typeface="Canva Sans"/>
+                <a:cs typeface="Canva Sans"/>
+                <a:sym typeface="Canva Sans"/>
+              </a:rPr>
+              <a:t>l</a:t>
+            </a:r>
+            <a:r>
+              <a:rPr lang="en-US" sz="2612">
+                <a:solidFill>
+                  <a:srgbClr val="000000"/>
+                </a:solidFill>
+                <a:latin typeface="Canva Sans"/>
+                <a:ea typeface="Canva Sans"/>
+                <a:cs typeface="Canva Sans"/>
+                <a:sym typeface="Canva Sans"/>
+              </a:rPr>
+              <a:t>ow, </a:t>
+            </a:r>
+            <a:r>
+              <a:rPr lang="en-US" sz="2612">
+                <a:solidFill>
+                  <a:srgbClr val="000000"/>
+                </a:solidFill>
+                <a:latin typeface="Canva Sans"/>
+                <a:ea typeface="Canva Sans"/>
+                <a:cs typeface="Canva Sans"/>
+                <a:sym typeface="Canva Sans"/>
+              </a:rPr>
+              <a:t>a</a:t>
+            </a:r>
+            <a:r>
+              <a:rPr lang="en-US" sz="2612">
+                <a:solidFill>
+                  <a:srgbClr val="000000"/>
+                </a:solidFill>
+                <a:latin typeface="Canva Sans"/>
+                <a:ea typeface="Canva Sans"/>
+                <a:cs typeface="Canva Sans"/>
+                <a:sym typeface="Canva Sans"/>
+              </a:rPr>
+              <a:t>nd</a:t>
+            </a:r>
+            <a:r>
+              <a:rPr lang="en-US" sz="2612">
+                <a:solidFill>
+                  <a:srgbClr val="000000"/>
+                </a:solidFill>
+                <a:latin typeface="Canva Sans"/>
+                <a:ea typeface="Canva Sans"/>
+                <a:cs typeface="Canva Sans"/>
+                <a:sym typeface="Canva Sans"/>
+              </a:rPr>
+              <a:t> </a:t>
+            </a:r>
+            <a:r>
+              <a:rPr lang="en-US" sz="2612">
+                <a:solidFill>
+                  <a:srgbClr val="000000"/>
+                </a:solidFill>
+                <a:latin typeface="Canva Sans"/>
+                <a:ea typeface="Canva Sans"/>
+                <a:cs typeface="Canva Sans"/>
+                <a:sym typeface="Canva Sans"/>
+              </a:rPr>
+              <a:t>r</a:t>
+            </a:r>
+            <a:r>
+              <a:rPr lang="en-US" sz="2612">
+                <a:solidFill>
+                  <a:srgbClr val="000000"/>
+                </a:solidFill>
+                <a:latin typeface="Canva Sans"/>
+                <a:ea typeface="Canva Sans"/>
+                <a:cs typeface="Canva Sans"/>
+                <a:sym typeface="Canva Sans"/>
+              </a:rPr>
+              <a:t>an</a:t>
+            </a:r>
+            <a:r>
+              <a:rPr lang="en-US" sz="2612">
+                <a:solidFill>
+                  <a:srgbClr val="000000"/>
+                </a:solidFill>
+                <a:latin typeface="Canva Sans"/>
+                <a:ea typeface="Canva Sans"/>
+                <a:cs typeface="Canva Sans"/>
+                <a:sym typeface="Canva Sans"/>
+              </a:rPr>
+              <a:t>domiz</a:t>
+            </a:r>
+            <a:r>
+              <a:rPr lang="en-US" sz="2612">
+                <a:solidFill>
+                  <a:srgbClr val="000000"/>
+                </a:solidFill>
+                <a:latin typeface="Canva Sans"/>
+                <a:ea typeface="Canva Sans"/>
+                <a:cs typeface="Canva Sans"/>
+                <a:sym typeface="Canva Sans"/>
+              </a:rPr>
+              <a:t>e</a:t>
+            </a:r>
+            <a:r>
+              <a:rPr lang="en-US" sz="2612">
+                <a:solidFill>
+                  <a:srgbClr val="000000"/>
+                </a:solidFill>
+                <a:latin typeface="Canva Sans"/>
+                <a:ea typeface="Canva Sans"/>
+                <a:cs typeface="Canva Sans"/>
+                <a:sym typeface="Canva Sans"/>
+              </a:rPr>
+              <a:t>d techniques for sampling and frequency reduction.</a:t>
+            </a:r>
+          </a:p>
+          <a:p>
+            <a:pPr algn="l" marL="563965" indent="-281983" lvl="1">
+              <a:lnSpc>
+                <a:spcPts val="3657"/>
+              </a:lnSpc>
+              <a:buAutoNum type="arabicPeriod" startAt="1"/>
+            </a:pPr>
+            <a:r>
+              <a:rPr lang="en-US" sz="2612">
+                <a:solidFill>
+                  <a:srgbClr val="000000"/>
+                </a:solidFill>
+                <a:latin typeface="Canva Sans"/>
+                <a:ea typeface="Canva Sans"/>
+                <a:cs typeface="Canva Sans"/>
+                <a:sym typeface="Canva Sans"/>
+              </a:rPr>
+              <a:t>Result</a:t>
+            </a:r>
+            <a:r>
+              <a:rPr lang="en-US" sz="2612">
+                <a:solidFill>
+                  <a:srgbClr val="000000"/>
+                </a:solidFill>
+                <a:latin typeface="Canva Sans"/>
+                <a:ea typeface="Canva Sans"/>
+                <a:cs typeface="Canva Sans"/>
+                <a:sym typeface="Canva Sans"/>
+              </a:rPr>
+              <a:t> </a:t>
+            </a:r>
+            <a:r>
+              <a:rPr lang="en-US" sz="2612">
+                <a:solidFill>
+                  <a:srgbClr val="000000"/>
+                </a:solidFill>
+                <a:latin typeface="Canva Sans"/>
+                <a:ea typeface="Canva Sans"/>
+                <a:cs typeface="Canva Sans"/>
+                <a:sym typeface="Canva Sans"/>
+              </a:rPr>
+              <a:t>v</a:t>
+            </a:r>
+            <a:r>
+              <a:rPr lang="en-US" sz="2612">
+                <a:solidFill>
+                  <a:srgbClr val="000000"/>
+                </a:solidFill>
+                <a:latin typeface="Canva Sans"/>
+                <a:ea typeface="Canva Sans"/>
+                <a:cs typeface="Canva Sans"/>
+                <a:sym typeface="Canva Sans"/>
+              </a:rPr>
+              <a:t>i</a:t>
+            </a:r>
+            <a:r>
+              <a:rPr lang="en-US" sz="2612">
+                <a:solidFill>
+                  <a:srgbClr val="000000"/>
+                </a:solidFill>
+                <a:latin typeface="Canva Sans"/>
+                <a:ea typeface="Canva Sans"/>
+                <a:cs typeface="Canva Sans"/>
+                <a:sym typeface="Canva Sans"/>
+              </a:rPr>
+              <a:t>sual</a:t>
+            </a:r>
+            <a:r>
+              <a:rPr lang="en-US" sz="2612">
+                <a:solidFill>
+                  <a:srgbClr val="000000"/>
+                </a:solidFill>
+                <a:latin typeface="Canva Sans"/>
+                <a:ea typeface="Canva Sans"/>
+                <a:cs typeface="Canva Sans"/>
+                <a:sym typeface="Canva Sans"/>
+              </a:rPr>
+              <a:t>iz</a:t>
+            </a:r>
+            <a:r>
+              <a:rPr lang="en-US" sz="2612">
+                <a:solidFill>
+                  <a:srgbClr val="000000"/>
+                </a:solidFill>
+                <a:latin typeface="Canva Sans"/>
+                <a:ea typeface="Canva Sans"/>
+                <a:cs typeface="Canva Sans"/>
+                <a:sym typeface="Canva Sans"/>
+              </a:rPr>
+              <a:t>ation:</a:t>
+            </a:r>
+            <a:r>
+              <a:rPr lang="en-US" sz="2612">
+                <a:solidFill>
+                  <a:srgbClr val="000000"/>
+                </a:solidFill>
+                <a:latin typeface="Canva Sans"/>
+                <a:ea typeface="Canva Sans"/>
+                <a:cs typeface="Canva Sans"/>
+                <a:sym typeface="Canva Sans"/>
+              </a:rPr>
+              <a:t> </a:t>
+            </a:r>
+            <a:r>
+              <a:rPr lang="en-US" sz="2612">
+                <a:solidFill>
+                  <a:srgbClr val="000000"/>
+                </a:solidFill>
+                <a:latin typeface="Canva Sans"/>
+                <a:ea typeface="Canva Sans"/>
+                <a:cs typeface="Canva Sans"/>
+                <a:sym typeface="Canva Sans"/>
+              </a:rPr>
+              <a:t>Displ</a:t>
+            </a:r>
+            <a:r>
+              <a:rPr lang="en-US" sz="2612">
+                <a:solidFill>
+                  <a:srgbClr val="000000"/>
+                </a:solidFill>
+                <a:latin typeface="Canva Sans"/>
+                <a:ea typeface="Canva Sans"/>
+                <a:cs typeface="Canva Sans"/>
+                <a:sym typeface="Canva Sans"/>
+              </a:rPr>
+              <a:t>ay</a:t>
+            </a:r>
+            <a:r>
+              <a:rPr lang="en-US" sz="2612">
+                <a:solidFill>
+                  <a:srgbClr val="000000"/>
+                </a:solidFill>
+                <a:latin typeface="Canva Sans"/>
+                <a:ea typeface="Canva Sans"/>
+                <a:cs typeface="Canva Sans"/>
+                <a:sym typeface="Canva Sans"/>
+              </a:rPr>
+              <a:t> </a:t>
+            </a:r>
+            <a:r>
+              <a:rPr lang="en-US" sz="2612">
+                <a:solidFill>
+                  <a:srgbClr val="000000"/>
+                </a:solidFill>
+                <a:latin typeface="Canva Sans"/>
+                <a:ea typeface="Canva Sans"/>
+                <a:cs typeface="Canva Sans"/>
+                <a:sym typeface="Canva Sans"/>
+              </a:rPr>
+              <a:t>t</a:t>
+            </a:r>
+            <a:r>
+              <a:rPr lang="en-US" sz="2612">
+                <a:solidFill>
+                  <a:srgbClr val="000000"/>
+                </a:solidFill>
+                <a:latin typeface="Canva Sans"/>
+                <a:ea typeface="Canva Sans"/>
+                <a:cs typeface="Canva Sans"/>
+                <a:sym typeface="Canva Sans"/>
+              </a:rPr>
+              <a:t>he selected shelves, route sequence, distance comparison and estimated savings.</a:t>
+            </a:r>
+          </a:p>
+          <a:p>
+            <a:pPr algn="l" marL="563965" indent="-281983" lvl="1">
+              <a:lnSpc>
+                <a:spcPts val="3657"/>
               </a:lnSpc>
               <a:spcBef>
                 <a:spcPct val="0"/>
               </a:spcBef>
+              <a:buAutoNum type="arabicPeriod" startAt="1"/>
             </a:pPr>
           </a:p>
         </p:txBody>
@@ -6911,386 +7887,6 @@
       <p:sp>
         <p:nvSpPr>
           <p:cNvPr name="TextBox 6" id="6"/>
-          <p:cNvSpPr txBox="true"/>
-          <p:nvPr/>
-        </p:nvSpPr>
-        <p:spPr>
-          <a:xfrm rot="0">
-            <a:off x="14017606" y="2004142"/>
-            <a:ext cx="3515797" cy="7003911"/>
-          </a:xfrm>
-          <a:prstGeom prst="rect">
-            <a:avLst/>
-          </a:prstGeom>
-        </p:spPr>
-        <p:txBody>
-          <a:bodyPr anchor="t" rtlCol="false" tIns="0" lIns="0" bIns="0" rIns="0">
-            <a:spAutoFit/>
-          </a:bodyPr>
-          <a:lstStyle/>
-          <a:p>
-            <a:pPr algn="ctr">
-              <a:lnSpc>
-                <a:spcPts val="3507"/>
-              </a:lnSpc>
-            </a:pPr>
-            <a:r>
-              <a:rPr lang="en-US" sz="2505" b="true">
-                <a:solidFill>
-                  <a:srgbClr val="000000"/>
-                </a:solidFill>
-                <a:latin typeface="Be Vietnam Ultra-Bold"/>
-                <a:ea typeface="Be Vietnam Ultra-Bold"/>
-                <a:cs typeface="Be Vietnam Ultra-Bold"/>
-                <a:sym typeface="Be Vietnam Ultra-Bold"/>
-              </a:rPr>
-              <a:t>Collect Data</a:t>
-            </a:r>
-          </a:p>
-          <a:p>
-            <a:pPr algn="ctr">
-              <a:lnSpc>
-                <a:spcPts val="3507"/>
-              </a:lnSpc>
-            </a:pPr>
-            <a:r>
-              <a:rPr lang="en-US" sz="2505" b="true">
-                <a:solidFill>
-                  <a:srgbClr val="000000"/>
-                </a:solidFill>
-                <a:latin typeface="Be Vietnam Ultra-Bold"/>
-                <a:ea typeface="Be Vietnam Ultra-Bold"/>
-                <a:cs typeface="Be Vietnam Ultra-Bold"/>
-                <a:sym typeface="Be Vietnam Ultra-Bold"/>
-              </a:rPr>
-              <a:t> ↓</a:t>
-            </a:r>
-          </a:p>
-          <a:p>
-            <a:pPr algn="ctr">
-              <a:lnSpc>
-                <a:spcPts val="3507"/>
-              </a:lnSpc>
-              <a:spcBef>
-                <a:spcPct val="0"/>
-              </a:spcBef>
-            </a:pPr>
-            <a:r>
-              <a:rPr lang="en-US" b="true" sz="2505">
-                <a:solidFill>
-                  <a:srgbClr val="000000"/>
-                </a:solidFill>
-                <a:latin typeface="Be Vietnam Ultra-Bold"/>
-                <a:ea typeface="Be Vietnam Ultra-Bold"/>
-                <a:cs typeface="Be Vietnam Ultra-Bold"/>
-                <a:sym typeface="Be Vietnam Ultra-Bold"/>
-              </a:rPr>
-              <a:t>St</a:t>
-            </a:r>
-            <a:r>
-              <a:rPr lang="en-US" b="true" sz="2505">
-                <a:solidFill>
-                  <a:srgbClr val="000000"/>
-                </a:solidFill>
-                <a:latin typeface="Be Vietnam Ultra-Bold"/>
-                <a:ea typeface="Be Vietnam Ultra-Bold"/>
-                <a:cs typeface="Be Vietnam Ultra-Bold"/>
-                <a:sym typeface="Be Vietnam Ultra-Bold"/>
-              </a:rPr>
-              <a:t>ore Data</a:t>
-            </a:r>
-          </a:p>
-          <a:p>
-            <a:pPr algn="ctr">
-              <a:lnSpc>
-                <a:spcPts val="3507"/>
-              </a:lnSpc>
-              <a:spcBef>
-                <a:spcPct val="0"/>
-              </a:spcBef>
-            </a:pPr>
-            <a:r>
-              <a:rPr lang="en-US" b="true" sz="2505">
-                <a:solidFill>
-                  <a:srgbClr val="000000"/>
-                </a:solidFill>
-                <a:latin typeface="Be Vietnam Ultra-Bold"/>
-                <a:ea typeface="Be Vietnam Ultra-Bold"/>
-                <a:cs typeface="Be Vietnam Ultra-Bold"/>
-                <a:sym typeface="Be Vietnam Ultra-Bold"/>
-              </a:rPr>
-              <a:t>ArrayList + HashMap</a:t>
-            </a:r>
-          </a:p>
-          <a:p>
-            <a:pPr algn="ctr">
-              <a:lnSpc>
-                <a:spcPts val="3507"/>
-              </a:lnSpc>
-              <a:spcBef>
-                <a:spcPct val="0"/>
-              </a:spcBef>
-            </a:pPr>
-            <a:r>
-              <a:rPr lang="en-US" b="true" sz="2505">
-                <a:solidFill>
-                  <a:srgbClr val="000000"/>
-                </a:solidFill>
-                <a:latin typeface="Be Vietnam Ultra-Bold"/>
-                <a:ea typeface="Be Vietnam Ultra-Bold"/>
-                <a:cs typeface="Be Vietnam Ultra-Bold"/>
-                <a:sym typeface="Be Vietnam Ultra-Bold"/>
-              </a:rPr>
-              <a:t> ↓</a:t>
-            </a:r>
-          </a:p>
-          <a:p>
-            <a:pPr algn="ctr">
-              <a:lnSpc>
-                <a:spcPts val="3507"/>
-              </a:lnSpc>
-              <a:spcBef>
-                <a:spcPct val="0"/>
-              </a:spcBef>
-            </a:pPr>
-            <a:r>
-              <a:rPr lang="en-US" b="true" sz="2505">
-                <a:solidFill>
-                  <a:srgbClr val="000000"/>
-                </a:solidFill>
-                <a:latin typeface="Be Vietnam Ultra-Bold"/>
-                <a:ea typeface="Be Vietnam Ultra-Bold"/>
-                <a:cs typeface="Be Vietnam Ultra-Bold"/>
-                <a:sym typeface="Be Vietnam Ultra-Bold"/>
-              </a:rPr>
-              <a:t>Calculate Priority</a:t>
-            </a:r>
-          </a:p>
-          <a:p>
-            <a:pPr algn="ctr">
-              <a:lnSpc>
-                <a:spcPts val="3507"/>
-              </a:lnSpc>
-              <a:spcBef>
-                <a:spcPct val="0"/>
-              </a:spcBef>
-            </a:pPr>
-            <a:r>
-              <a:rPr lang="en-US" b="true" sz="2505">
-                <a:solidFill>
-                  <a:srgbClr val="000000"/>
-                </a:solidFill>
-                <a:latin typeface="Be Vietnam Ultra-Bold"/>
-                <a:ea typeface="Be Vietnam Ultra-Bold"/>
-                <a:cs typeface="Be Vietnam Ultra-Bold"/>
-                <a:sym typeface="Be Vietnam Ultra-Bold"/>
-              </a:rPr>
-              <a:t> ↓</a:t>
-            </a:r>
-          </a:p>
-          <a:p>
-            <a:pPr algn="ctr">
-              <a:lnSpc>
-                <a:spcPts val="3507"/>
-              </a:lnSpc>
-              <a:spcBef>
-                <a:spcPct val="0"/>
-              </a:spcBef>
-            </a:pPr>
-            <a:r>
-              <a:rPr lang="en-US" b="true" sz="2505">
-                <a:solidFill>
-                  <a:srgbClr val="000000"/>
-                </a:solidFill>
-                <a:latin typeface="Be Vietnam Ultra-Bold"/>
-                <a:ea typeface="Be Vietnam Ultra-Bold"/>
-                <a:cs typeface="Be Vietnam Ultra-Bold"/>
-                <a:sym typeface="Be Vietnam Ultra-Bold"/>
-              </a:rPr>
-              <a:t>Sort Products</a:t>
-            </a:r>
-          </a:p>
-          <a:p>
-            <a:pPr algn="ctr">
-              <a:lnSpc>
-                <a:spcPts val="3507"/>
-              </a:lnSpc>
-              <a:spcBef>
-                <a:spcPct val="0"/>
-              </a:spcBef>
-            </a:pPr>
-            <a:r>
-              <a:rPr lang="en-US" b="true" sz="2505">
-                <a:solidFill>
-                  <a:srgbClr val="000000"/>
-                </a:solidFill>
-                <a:latin typeface="Be Vietnam Ultra-Bold"/>
-                <a:ea typeface="Be Vietnam Ultra-Bold"/>
-                <a:cs typeface="Be Vietnam Ultra-Bold"/>
-                <a:sym typeface="Be Vietnam Ultra-Bold"/>
-              </a:rPr>
-              <a:t>Sorting Algorithm</a:t>
-            </a:r>
-          </a:p>
-          <a:p>
-            <a:pPr algn="ctr">
-              <a:lnSpc>
-                <a:spcPts val="3507"/>
-              </a:lnSpc>
-              <a:spcBef>
-                <a:spcPct val="0"/>
-              </a:spcBef>
-            </a:pPr>
-            <a:r>
-              <a:rPr lang="en-US" b="true" sz="2505">
-                <a:solidFill>
-                  <a:srgbClr val="000000"/>
-                </a:solidFill>
-                <a:latin typeface="Be Vietnam Ultra-Bold"/>
-                <a:ea typeface="Be Vietnam Ultra-Bold"/>
-                <a:cs typeface="Be Vietnam Ultra-Bold"/>
-                <a:sym typeface="Be Vietnam Ultra-Bold"/>
-              </a:rPr>
-              <a:t> ↓</a:t>
-            </a:r>
-          </a:p>
-          <a:p>
-            <a:pPr algn="ctr">
-              <a:lnSpc>
-                <a:spcPts val="3507"/>
-              </a:lnSpc>
-              <a:spcBef>
-                <a:spcPct val="0"/>
-              </a:spcBef>
-            </a:pPr>
-            <a:r>
-              <a:rPr lang="en-US" b="true" sz="2505">
-                <a:solidFill>
-                  <a:srgbClr val="000000"/>
-                </a:solidFill>
-                <a:latin typeface="Be Vietnam Ultra-Bold"/>
-                <a:ea typeface="Be Vietnam Ultra-Bold"/>
-                <a:cs typeface="Be Vietnam Ultra-Bold"/>
-                <a:sym typeface="Be Vietnam Ultra-Bold"/>
-              </a:rPr>
-              <a:t>Assign Slots</a:t>
-            </a:r>
-          </a:p>
-          <a:p>
-            <a:pPr algn="ctr">
-              <a:lnSpc>
-                <a:spcPts val="3507"/>
-              </a:lnSpc>
-              <a:spcBef>
-                <a:spcPct val="0"/>
-              </a:spcBef>
-            </a:pPr>
-            <a:r>
-              <a:rPr lang="en-US" b="true" sz="2505">
-                <a:solidFill>
-                  <a:srgbClr val="000000"/>
-                </a:solidFill>
-                <a:latin typeface="Be Vietnam Ultra-Bold"/>
-                <a:ea typeface="Be Vietnam Ultra-Bold"/>
-                <a:cs typeface="Be Vietnam Ultra-Bold"/>
-                <a:sym typeface="Be Vietnam Ultra-Bold"/>
-              </a:rPr>
-              <a:t>PriorityQueue + Greedy</a:t>
-            </a:r>
-          </a:p>
-          <a:p>
-            <a:pPr algn="ctr">
-              <a:lnSpc>
-                <a:spcPts val="3507"/>
-              </a:lnSpc>
-              <a:spcBef>
-                <a:spcPct val="0"/>
-              </a:spcBef>
-            </a:pPr>
-            <a:r>
-              <a:rPr lang="en-US" b="true" sz="2505">
-                <a:solidFill>
-                  <a:srgbClr val="000000"/>
-                </a:solidFill>
-                <a:latin typeface="Be Vietnam Ultra-Bold"/>
-                <a:ea typeface="Be Vietnam Ultra-Bold"/>
-                <a:cs typeface="Be Vietnam Ultra-Bold"/>
-                <a:sym typeface="Be Vietnam Ultra-Bold"/>
-              </a:rPr>
-              <a:t> ↓</a:t>
-            </a:r>
-          </a:p>
-          <a:p>
-            <a:pPr algn="ctr">
-              <a:lnSpc>
-                <a:spcPts val="3507"/>
-              </a:lnSpc>
-              <a:spcBef>
-                <a:spcPct val="0"/>
-              </a:spcBef>
-            </a:pPr>
-            <a:r>
-              <a:rPr lang="en-US" b="true" sz="2505">
-                <a:solidFill>
-                  <a:srgbClr val="000000"/>
-                </a:solidFill>
-                <a:latin typeface="Be Vietnam Ultra-Bold"/>
-                <a:ea typeface="Be Vietnam Ultra-Bold"/>
-                <a:cs typeface="Be Vietnam Ultra-Bold"/>
-                <a:sym typeface="Be Vietnam Ultra-Bold"/>
-              </a:rPr>
-              <a:t>Calculate Distance</a:t>
-            </a:r>
-          </a:p>
-          <a:p>
-            <a:pPr algn="ctr">
-              <a:lnSpc>
-                <a:spcPts val="3507"/>
-              </a:lnSpc>
-              <a:spcBef>
-                <a:spcPct val="0"/>
-              </a:spcBef>
-            </a:pPr>
-            <a:r>
-              <a:rPr lang="en-US" b="true" sz="2505">
-                <a:solidFill>
-                  <a:srgbClr val="000000"/>
-                </a:solidFill>
-                <a:latin typeface="Be Vietnam Ultra-Bold"/>
-                <a:ea typeface="Be Vietnam Ultra-Bold"/>
-                <a:cs typeface="Be Vietnam Ultra-Bold"/>
-                <a:sym typeface="Be Vietnam Ultra-Bold"/>
-              </a:rPr>
-              <a:t> ↓</a:t>
-            </a:r>
-          </a:p>
-          <a:p>
-            <a:pPr algn="ctr">
-              <a:lnSpc>
-                <a:spcPts val="3507"/>
-              </a:lnSpc>
-              <a:spcBef>
-                <a:spcPct val="0"/>
-              </a:spcBef>
-            </a:pPr>
-            <a:r>
-              <a:rPr lang="en-US" b="true" sz="2505">
-                <a:solidFill>
-                  <a:srgbClr val="000000"/>
-                </a:solidFill>
-                <a:latin typeface="Be Vietnam Ultra-Bold"/>
-                <a:ea typeface="Be Vietnam Ultra-Bold"/>
-                <a:cs typeface="Be Vietnam Ultra-Bold"/>
-                <a:sym typeface="Be Vietnam Ultra-Bold"/>
-              </a:rPr>
-              <a:t>Optimized Layout</a:t>
-            </a:r>
-          </a:p>
-        </p:txBody>
-      </p:sp>
-      <p:sp>
-        <p:nvSpPr>
-          <p:cNvPr name="TextBox 7" id="7"/>
           <p:cNvSpPr txBox="true"/>
           <p:nvPr/>
         </p:nvSpPr>
@@ -7331,7 +7927,7 @@
       </p:sp>
       <p:sp>
         <p:nvSpPr>
-          <p:cNvPr name="Freeform 8" id="8"/>
+          <p:cNvPr name="Freeform 7" id="7"/>
           <p:cNvSpPr/>
           <p:nvPr/>
         </p:nvSpPr>
@@ -7388,7 +7984,7 @@
       </p:sp>
       <p:sp>
         <p:nvSpPr>
-          <p:cNvPr name="TextBox 9" id="9"/>
+          <p:cNvPr name="TextBox 8" id="8"/>
           <p:cNvSpPr txBox="true"/>
           <p:nvPr/>
         </p:nvSpPr>
@@ -7422,7 +8018,7 @@
                 <a:cs typeface="Be Vietnam Ultra-Bold"/>
                 <a:sym typeface="Be Vietnam Ultra-Bold"/>
               </a:rPr>
-              <a:t>05</a:t>
+              <a:t>06</a:t>
             </a:r>
           </a:p>
         </p:txBody>
@@ -7441,7 +8037,7 @@
     <p:bg>
       <p:bgPr>
         <a:solidFill>
-          <a:srgbClr val="DA7D51"/>
+          <a:srgbClr val="FAF2E8"/>
         </a:solidFill>
       </p:bgPr>
     </p:bg>
@@ -7459,464 +8055,9 @@
           <a:chExt cx="0" cy="0"/>
         </a:xfrm>
       </p:grpSpPr>
-      <p:sp>
-        <p:nvSpPr>
-          <p:cNvPr name="Freeform 2" id="2"/>
-          <p:cNvSpPr/>
-          <p:nvPr/>
-        </p:nvSpPr>
-        <p:spPr>
-          <a:xfrm flipH="false" flipV="false" rot="0">
-            <a:off x="3572525" y="3582329"/>
-            <a:ext cx="11142950" cy="6564210"/>
-          </a:xfrm>
-          <a:custGeom>
-            <a:avLst/>
-            <a:gdLst/>
-            <a:ahLst/>
-            <a:cxnLst/>
-            <a:rect r="r" b="b" t="t" l="l"/>
-            <a:pathLst>
-              <a:path h="6564210" w="11142950">
-                <a:moveTo>
-                  <a:pt x="0" y="0"/>
-                </a:moveTo>
-                <a:lnTo>
-                  <a:pt x="11142950" y="0"/>
-                </a:lnTo>
-                <a:lnTo>
-                  <a:pt x="11142950" y="6564211"/>
-                </a:lnTo>
-                <a:lnTo>
-                  <a:pt x="0" y="6564211"/>
-                </a:lnTo>
-                <a:lnTo>
-                  <a:pt x="0" y="0"/>
-                </a:lnTo>
-                <a:close/>
-              </a:path>
-            </a:pathLst>
-          </a:custGeom>
-          <a:blipFill>
-            <a:blip r:embed="rId2">
-              <a:extLst>
-                <a:ext uri="{96DAC541-7B7A-43D3-8B79-37D633B846F1}">
-                  <asvg:svgBlip xmlns:asvg="http://schemas.microsoft.com/office/drawing/2016/SVG/main" r:embed="rId3"/>
-                </a:ext>
-              </a:extLst>
-            </a:blip>
-            <a:stretch>
-              <a:fillRect l="0" t="0" r="0" b="0"/>
-            </a:stretch>
-          </a:blipFill>
-        </p:spPr>
-      </p:sp>
-      <p:sp>
-        <p:nvSpPr>
-          <p:cNvPr name="TextBox 3" id="3"/>
-          <p:cNvSpPr txBox="true"/>
-          <p:nvPr/>
-        </p:nvSpPr>
-        <p:spPr>
-          <a:xfrm rot="0">
-            <a:off x="4047486" y="1311574"/>
-            <a:ext cx="10193028" cy="1930830"/>
-          </a:xfrm>
-          <a:prstGeom prst="rect">
-            <a:avLst/>
-          </a:prstGeom>
-        </p:spPr>
-        <p:txBody>
-          <a:bodyPr anchor="t" rtlCol="false" tIns="0" lIns="0" bIns="0" rIns="0">
-            <a:spAutoFit/>
-          </a:bodyPr>
-          <a:lstStyle/>
-          <a:p>
-            <a:pPr algn="ctr">
-              <a:lnSpc>
-                <a:spcPts val="15404"/>
-              </a:lnSpc>
-            </a:pPr>
-            <a:r>
-              <a:rPr lang="en-US" b="true" sz="11941">
-                <a:solidFill>
-                  <a:srgbClr val="FFFFFF"/>
-                </a:solidFill>
-                <a:latin typeface="Be Vietnam Ultra-Bold"/>
-                <a:ea typeface="Be Vietnam Ultra-Bold"/>
-                <a:cs typeface="Be Vietnam Ultra-Bold"/>
-                <a:sym typeface="Be Vietnam Ultra-Bold"/>
-              </a:rPr>
-              <a:t>Thank You</a:t>
-            </a:r>
-          </a:p>
-        </p:txBody>
-      </p:sp>
       <p:grpSp>
         <p:nvGrpSpPr>
-          <p:cNvPr name="Group 4" id="4"/>
-          <p:cNvGrpSpPr/>
-          <p:nvPr/>
-        </p:nvGrpSpPr>
-        <p:grpSpPr>
-          <a:xfrm rot="0">
-            <a:off x="1385120" y="1028700"/>
-            <a:ext cx="15517760" cy="410448"/>
-            <a:chOff x="0" y="0"/>
-            <a:chExt cx="4086982" cy="108101"/>
-          </a:xfrm>
-        </p:grpSpPr>
-        <p:sp>
-          <p:nvSpPr>
-            <p:cNvPr name="Freeform 5" id="5"/>
-            <p:cNvSpPr/>
-            <p:nvPr/>
-          </p:nvSpPr>
-          <p:spPr>
-            <a:xfrm flipH="false" flipV="false" rot="0">
-              <a:off x="0" y="0"/>
-              <a:ext cx="4086982" cy="108101"/>
-            </a:xfrm>
-            <a:custGeom>
-              <a:avLst/>
-              <a:gdLst/>
-              <a:ahLst/>
-              <a:cxnLst/>
-              <a:rect r="r" b="b" t="t" l="l"/>
-              <a:pathLst>
-                <a:path h="108101" w="4086982">
-                  <a:moveTo>
-                    <a:pt x="25444" y="0"/>
-                  </a:moveTo>
-                  <a:lnTo>
-                    <a:pt x="4061538" y="0"/>
-                  </a:lnTo>
-                  <a:cubicBezTo>
-                    <a:pt x="4075590" y="0"/>
-                    <a:pt x="4086982" y="11392"/>
-                    <a:pt x="4086982" y="25444"/>
-                  </a:cubicBezTo>
-                  <a:lnTo>
-                    <a:pt x="4086982" y="82657"/>
-                  </a:lnTo>
-                  <a:cubicBezTo>
-                    <a:pt x="4086982" y="96710"/>
-                    <a:pt x="4075590" y="108101"/>
-                    <a:pt x="4061538" y="108101"/>
-                  </a:cubicBezTo>
-                  <a:lnTo>
-                    <a:pt x="25444" y="108101"/>
-                  </a:lnTo>
-                  <a:cubicBezTo>
-                    <a:pt x="11392" y="108101"/>
-                    <a:pt x="0" y="96710"/>
-                    <a:pt x="0" y="82657"/>
-                  </a:cubicBezTo>
-                  <a:lnTo>
-                    <a:pt x="0" y="25444"/>
-                  </a:lnTo>
-                  <a:cubicBezTo>
-                    <a:pt x="0" y="11392"/>
-                    <a:pt x="11392" y="0"/>
-                    <a:pt x="25444" y="0"/>
-                  </a:cubicBezTo>
-                  <a:close/>
-                </a:path>
-              </a:pathLst>
-            </a:custGeom>
-            <a:solidFill>
-              <a:srgbClr val="FAF2E8"/>
-            </a:solidFill>
-          </p:spPr>
-        </p:sp>
-        <p:sp>
-          <p:nvSpPr>
-            <p:cNvPr name="TextBox 6" id="6"/>
-            <p:cNvSpPr txBox="true"/>
-            <p:nvPr/>
-          </p:nvSpPr>
-          <p:spPr>
-            <a:xfrm>
-              <a:off x="0" y="-38100"/>
-              <a:ext cx="4086982" cy="146201"/>
-            </a:xfrm>
-            <a:prstGeom prst="rect">
-              <a:avLst/>
-            </a:prstGeom>
-          </p:spPr>
-          <p:txBody>
-            <a:bodyPr anchor="ctr" rtlCol="false" tIns="50800" lIns="50800" bIns="50800" rIns="50800"/>
-            <a:lstStyle/>
-            <a:p>
-              <a:pPr algn="ctr">
-                <a:lnSpc>
-                  <a:spcPts val="2940"/>
-                </a:lnSpc>
-              </a:pPr>
-            </a:p>
-          </p:txBody>
-        </p:sp>
-      </p:grpSp>
-      <p:sp>
-        <p:nvSpPr>
-          <p:cNvPr name="Freeform 7" id="7"/>
-          <p:cNvSpPr/>
-          <p:nvPr/>
-        </p:nvSpPr>
-        <p:spPr>
-          <a:xfrm flipH="false" flipV="false" rot="0">
-            <a:off x="1568899" y="1118411"/>
-            <a:ext cx="345282" cy="231025"/>
-          </a:xfrm>
-          <a:custGeom>
-            <a:avLst/>
-            <a:gdLst/>
-            <a:ahLst/>
-            <a:cxnLst/>
-            <a:rect r="r" b="b" t="t" l="l"/>
-            <a:pathLst>
-              <a:path h="231025" w="345282">
-                <a:moveTo>
-                  <a:pt x="0" y="0"/>
-                </a:moveTo>
-                <a:lnTo>
-                  <a:pt x="345282" y="0"/>
-                </a:lnTo>
-                <a:lnTo>
-                  <a:pt x="345282" y="231025"/>
-                </a:lnTo>
-                <a:lnTo>
-                  <a:pt x="0" y="231025"/>
-                </a:lnTo>
-                <a:lnTo>
-                  <a:pt x="0" y="0"/>
-                </a:lnTo>
-                <a:close/>
-              </a:path>
-            </a:pathLst>
-          </a:custGeom>
-          <a:blipFill>
-            <a:blip r:embed="rId4">
-              <a:extLst>
-                <a:ext uri="{96DAC541-7B7A-43D3-8B79-37D633B846F1}">
-                  <asvg:svgBlip xmlns:asvg="http://schemas.microsoft.com/office/drawing/2016/SVG/main" r:embed="rId5"/>
-                </a:ext>
-              </a:extLst>
-            </a:blip>
-            <a:stretch>
-              <a:fillRect l="0" t="0" r="0" b="0"/>
-            </a:stretch>
-          </a:blipFill>
-        </p:spPr>
-      </p:sp>
-      <p:sp>
-        <p:nvSpPr>
-          <p:cNvPr name="TextBox 8" id="8"/>
-          <p:cNvSpPr txBox="true"/>
-          <p:nvPr/>
-        </p:nvSpPr>
-        <p:spPr>
-          <a:xfrm rot="0">
-            <a:off x="1741540" y="1087556"/>
-            <a:ext cx="2343875" cy="264160"/>
-          </a:xfrm>
-          <a:prstGeom prst="rect">
-            <a:avLst/>
-          </a:prstGeom>
-        </p:spPr>
-        <p:txBody>
-          <a:bodyPr anchor="t" rtlCol="false" tIns="0" lIns="0" bIns="0" rIns="0">
-            <a:spAutoFit/>
-          </a:bodyPr>
-          <a:lstStyle/>
-          <a:p>
-            <a:pPr algn="ctr">
-              <a:lnSpc>
-                <a:spcPts val="2239"/>
-              </a:lnSpc>
-            </a:pPr>
-            <a:r>
-              <a:rPr lang="en-US" b="true" sz="1599">
-                <a:solidFill>
-                  <a:srgbClr val="C26337"/>
-                </a:solidFill>
-                <a:latin typeface="Be Vietnam Ultra-Bold"/>
-                <a:ea typeface="Be Vietnam Ultra-Bold"/>
-                <a:cs typeface="Be Vietnam Ultra-Bold"/>
-                <a:sym typeface="Be Vietnam Ultra-Bold"/>
-              </a:rPr>
-              <a:t>Borcelle Company</a:t>
-            </a:r>
-          </a:p>
-        </p:txBody>
-      </p:sp>
-      <p:sp>
-        <p:nvSpPr>
-          <p:cNvPr name="TextBox 9" id="9"/>
-          <p:cNvSpPr txBox="true"/>
-          <p:nvPr/>
-        </p:nvSpPr>
-        <p:spPr>
-          <a:xfrm rot="0">
-            <a:off x="11843210" y="1089836"/>
-            <a:ext cx="1015978" cy="264160"/>
-          </a:xfrm>
-          <a:prstGeom prst="rect">
-            <a:avLst/>
-          </a:prstGeom>
-        </p:spPr>
-        <p:txBody>
-          <a:bodyPr anchor="t" rtlCol="false" tIns="0" lIns="0" bIns="0" rIns="0">
-            <a:spAutoFit/>
-          </a:bodyPr>
-          <a:lstStyle/>
-          <a:p>
-            <a:pPr algn="ctr">
-              <a:lnSpc>
-                <a:spcPts val="2239"/>
-              </a:lnSpc>
-            </a:pPr>
-            <a:r>
-              <a:rPr lang="en-US" sz="1599">
-                <a:solidFill>
-                  <a:srgbClr val="C26337"/>
-                </a:solidFill>
-                <a:latin typeface="Be Vietnam"/>
-                <a:ea typeface="Be Vietnam"/>
-                <a:cs typeface="Be Vietnam"/>
-                <a:sym typeface="Be Vietnam"/>
-              </a:rPr>
-              <a:t>Home</a:t>
-            </a:r>
-          </a:p>
-        </p:txBody>
-      </p:sp>
-      <p:sp>
-        <p:nvSpPr>
-          <p:cNvPr name="TextBox 10" id="10"/>
-          <p:cNvSpPr txBox="true"/>
-          <p:nvPr/>
-        </p:nvSpPr>
-        <p:spPr>
-          <a:xfrm rot="0">
-            <a:off x="13128769" y="1089836"/>
-            <a:ext cx="1015978" cy="264160"/>
-          </a:xfrm>
-          <a:prstGeom prst="rect">
-            <a:avLst/>
-          </a:prstGeom>
-        </p:spPr>
-        <p:txBody>
-          <a:bodyPr anchor="t" rtlCol="false" tIns="0" lIns="0" bIns="0" rIns="0">
-            <a:spAutoFit/>
-          </a:bodyPr>
-          <a:lstStyle/>
-          <a:p>
-            <a:pPr algn="ctr">
-              <a:lnSpc>
-                <a:spcPts val="2239"/>
-              </a:lnSpc>
-            </a:pPr>
-            <a:r>
-              <a:rPr lang="en-US" sz="1599">
-                <a:solidFill>
-                  <a:srgbClr val="C26337"/>
-                </a:solidFill>
-                <a:latin typeface="Be Vietnam"/>
-                <a:ea typeface="Be Vietnam"/>
-                <a:cs typeface="Be Vietnam"/>
-                <a:sym typeface="Be Vietnam"/>
-              </a:rPr>
-              <a:t>Gallery</a:t>
-            </a:r>
-          </a:p>
-        </p:txBody>
-      </p:sp>
-      <p:sp>
-        <p:nvSpPr>
-          <p:cNvPr name="TextBox 11" id="11"/>
-          <p:cNvSpPr txBox="true"/>
-          <p:nvPr/>
-        </p:nvSpPr>
-        <p:spPr>
-          <a:xfrm rot="0">
-            <a:off x="14411447" y="1089836"/>
-            <a:ext cx="1015978" cy="264160"/>
-          </a:xfrm>
-          <a:prstGeom prst="rect">
-            <a:avLst/>
-          </a:prstGeom>
-        </p:spPr>
-        <p:txBody>
-          <a:bodyPr anchor="t" rtlCol="false" tIns="0" lIns="0" bIns="0" rIns="0">
-            <a:spAutoFit/>
-          </a:bodyPr>
-          <a:lstStyle/>
-          <a:p>
-            <a:pPr algn="ctr">
-              <a:lnSpc>
-                <a:spcPts val="2239"/>
-              </a:lnSpc>
-            </a:pPr>
-            <a:r>
-              <a:rPr lang="en-US" sz="1599">
-                <a:solidFill>
-                  <a:srgbClr val="C26337"/>
-                </a:solidFill>
-                <a:latin typeface="Be Vietnam"/>
-                <a:ea typeface="Be Vietnam"/>
-                <a:cs typeface="Be Vietnam"/>
-                <a:sym typeface="Be Vietnam"/>
-              </a:rPr>
-              <a:t>About Us</a:t>
-            </a:r>
-          </a:p>
-        </p:txBody>
-      </p:sp>
-      <p:sp>
-        <p:nvSpPr>
-          <p:cNvPr name="TextBox 12" id="12"/>
-          <p:cNvSpPr txBox="true"/>
-          <p:nvPr/>
-        </p:nvSpPr>
-        <p:spPr>
-          <a:xfrm rot="0">
-            <a:off x="15694125" y="1089836"/>
-            <a:ext cx="1015978" cy="264160"/>
-          </a:xfrm>
-          <a:prstGeom prst="rect">
-            <a:avLst/>
-          </a:prstGeom>
-        </p:spPr>
-        <p:txBody>
-          <a:bodyPr anchor="t" rtlCol="false" tIns="0" lIns="0" bIns="0" rIns="0">
-            <a:spAutoFit/>
-          </a:bodyPr>
-          <a:lstStyle/>
-          <a:p>
-            <a:pPr algn="ctr">
-              <a:lnSpc>
-                <a:spcPts val="2239"/>
-              </a:lnSpc>
-            </a:pPr>
-            <a:r>
-              <a:rPr lang="en-US" sz="1599">
-                <a:solidFill>
-                  <a:srgbClr val="C26337"/>
-                </a:solidFill>
-                <a:latin typeface="Be Vietnam"/>
-                <a:ea typeface="Be Vietnam"/>
-                <a:cs typeface="Be Vietnam"/>
-                <a:sym typeface="Be Vietnam"/>
-              </a:rPr>
-              <a:t>Menu</a:t>
-            </a:r>
-          </a:p>
-        </p:txBody>
-      </p:sp>
-      <p:grpSp>
-        <p:nvGrpSpPr>
-          <p:cNvPr name="Group 13" id="13"/>
+          <p:cNvPr name="Group 2" id="2"/>
           <p:cNvGrpSpPr/>
           <p:nvPr/>
         </p:nvGrpSpPr>
@@ -7930,7 +8071,7 @@
         </p:grpSpPr>
         <p:sp>
           <p:nvSpPr>
-            <p:cNvPr name="Freeform 14" id="14"/>
+            <p:cNvPr name="Freeform 3" id="3"/>
             <p:cNvSpPr/>
             <p:nvPr/>
           </p:nvSpPr>
@@ -8007,13 +8148,13 @@
               </a:pathLst>
             </a:custGeom>
             <a:solidFill>
-              <a:srgbClr val="FAF2E8"/>
+              <a:srgbClr val="DA7D51"/>
             </a:solidFill>
           </p:spPr>
         </p:sp>
         <p:sp>
           <p:nvSpPr>
-            <p:cNvPr name="TextBox 15" id="15"/>
+            <p:cNvPr name="TextBox 4" id="4"/>
             <p:cNvSpPr txBox="true"/>
             <p:nvPr/>
           </p:nvSpPr>
@@ -8041,7 +8182,53 @@
       </p:grpSp>
       <p:sp>
         <p:nvSpPr>
-          <p:cNvPr name="TextBox 16" id="16"/>
+          <p:cNvPr name="Freeform 5" id="5"/>
+          <p:cNvSpPr/>
+          <p:nvPr/>
+        </p:nvSpPr>
+        <p:spPr>
+          <a:xfrm flipH="false" flipV="false" rot="0">
+            <a:off x="819159" y="21966"/>
+            <a:ext cx="14798590" cy="10265034"/>
+          </a:xfrm>
+          <a:custGeom>
+            <a:avLst/>
+            <a:gdLst/>
+            <a:ahLst/>
+            <a:cxnLst/>
+            <a:rect r="r" b="b" t="t" l="l"/>
+            <a:pathLst>
+              <a:path h="10265034" w="14798590">
+                <a:moveTo>
+                  <a:pt x="0" y="0"/>
+                </a:moveTo>
+                <a:lnTo>
+                  <a:pt x="14798590" y="0"/>
+                </a:lnTo>
+                <a:lnTo>
+                  <a:pt x="14798590" y="10265034"/>
+                </a:lnTo>
+                <a:lnTo>
+                  <a:pt x="0" y="10265034"/>
+                </a:lnTo>
+                <a:lnTo>
+                  <a:pt x="0" y="0"/>
+                </a:lnTo>
+                <a:close/>
+              </a:path>
+            </a:pathLst>
+          </a:custGeom>
+          <a:blipFill>
+            <a:blip r:embed="rId2"/>
+            <a:stretch>
+              <a:fillRect l="0" t="0" r="-1116" b="0"/>
+            </a:stretch>
+          </a:blipFill>
+        </p:spPr>
+      </p:sp>
+      <p:sp>
+        <p:nvSpPr>
+          <p:cNvPr name="TextBox 6" id="6"/>
           <p:cNvSpPr txBox="true"/>
           <p:nvPr/>
         </p:nvSpPr>
@@ -8068,28 +8255,185 @@
             <a:r>
               <a:rPr lang="en-US" sz="3507" b="true">
                 <a:solidFill>
-                  <a:srgbClr val="C26337"/>
+                  <a:srgbClr val="FFFFFF"/>
                 </a:solidFill>
                 <a:latin typeface="Be Vietnam Ultra-Bold"/>
                 <a:ea typeface="Be Vietnam Ultra-Bold"/>
                 <a:cs typeface="Be Vietnam Ultra-Bold"/>
                 <a:sym typeface="Be Vietnam Ultra-Bold"/>
               </a:rPr>
-              <a:t>17</a:t>
+              <a:t>07</a:t>
             </a:r>
           </a:p>
         </p:txBody>
       </p:sp>
-      <p:sp>
-        <p:nvSpPr>
-          <p:cNvPr name="Freeform 17" id="17"/>
+    </p:spTree>
+  </p:cSld>
+  <p:clrMapOvr>
+    <a:masterClrMapping/>
+  </p:clrMapOvr>
+</p:sld>
+</file>
+
+<file path=ppt/slides/slide8.xml><?xml version="1.0" encoding="utf-8"?>
+<p:sld xmlns:p="http://schemas.openxmlformats.org/presentationml/2006/main" xmlns:a="http://schemas.openxmlformats.org/drawingml/2006/main" xmlns:r="http://schemas.openxmlformats.org/officeDocument/2006/relationships">
+  <p:cSld>
+    <p:bg>
+      <p:bgPr>
+        <a:solidFill>
+          <a:srgbClr val="FAF2E8"/>
+        </a:solidFill>
+      </p:bgPr>
+    </p:bg>
+    <p:spTree>
+      <p:nvGrpSpPr>
+        <p:cNvPr id="1" name=""/>
+        <p:cNvGrpSpPr/>
+        <p:nvPr/>
+      </p:nvGrpSpPr>
+      <p:grpSpPr>
+        <a:xfrm>
+          <a:off x="0" y="0"/>
+          <a:ext cx="0" cy="0"/>
+          <a:chOff x="0" y="0"/>
+          <a:chExt cx="0" cy="0"/>
+        </a:xfrm>
+      </p:grpSpPr>
+      <p:grpSp>
+        <p:nvGrpSpPr>
+          <p:cNvPr name="Group 2" id="2"/>
+          <p:cNvGrpSpPr/>
+          <p:nvPr/>
+        </p:nvGrpSpPr>
+        <p:grpSpPr>
+          <a:xfrm rot="0">
+            <a:off x="16349641" y="9258300"/>
+            <a:ext cx="909659" cy="1487543"/>
+            <a:chOff x="0" y="0"/>
+            <a:chExt cx="239581" cy="391781"/>
+          </a:xfrm>
+        </p:grpSpPr>
+        <p:sp>
+          <p:nvSpPr>
+            <p:cNvPr name="Freeform 3" id="3"/>
+            <p:cNvSpPr/>
+            <p:nvPr/>
+          </p:nvSpPr>
+          <p:spPr>
+            <a:xfrm flipH="false" flipV="false" rot="0">
+              <a:off x="0" y="0"/>
+              <a:ext cx="239581" cy="391781"/>
+            </a:xfrm>
+            <a:custGeom>
+              <a:avLst/>
+              <a:gdLst/>
+              <a:ahLst/>
+              <a:cxnLst/>
+              <a:rect r="r" b="b" t="t" l="l"/>
+              <a:pathLst>
+                <a:path h="391781" w="239581">
+                  <a:moveTo>
+                    <a:pt x="119790" y="0"/>
+                  </a:moveTo>
+                  <a:lnTo>
+                    <a:pt x="119790" y="0"/>
+                  </a:lnTo>
+                  <a:cubicBezTo>
+                    <a:pt x="151561" y="0"/>
+                    <a:pt x="182030" y="12621"/>
+                    <a:pt x="204495" y="35086"/>
+                  </a:cubicBezTo>
+                  <a:cubicBezTo>
+                    <a:pt x="226960" y="57551"/>
+                    <a:pt x="239581" y="88020"/>
+                    <a:pt x="239581" y="119790"/>
+                  </a:cubicBezTo>
+                  <a:lnTo>
+                    <a:pt x="239581" y="271990"/>
+                  </a:lnTo>
+                  <a:cubicBezTo>
+                    <a:pt x="239581" y="303761"/>
+                    <a:pt x="226960" y="334230"/>
+                    <a:pt x="204495" y="356695"/>
+                  </a:cubicBezTo>
+                  <a:cubicBezTo>
+                    <a:pt x="182030" y="379160"/>
+                    <a:pt x="151561" y="391781"/>
+                    <a:pt x="119790" y="391781"/>
+                  </a:cubicBezTo>
+                  <a:lnTo>
+                    <a:pt x="119790" y="391781"/>
+                  </a:lnTo>
+                  <a:cubicBezTo>
+                    <a:pt x="88020" y="391781"/>
+                    <a:pt x="57551" y="379160"/>
+                    <a:pt x="35086" y="356695"/>
+                  </a:cubicBezTo>
+                  <a:cubicBezTo>
+                    <a:pt x="12621" y="334230"/>
+                    <a:pt x="0" y="303761"/>
+                    <a:pt x="0" y="271990"/>
+                  </a:cubicBezTo>
+                  <a:lnTo>
+                    <a:pt x="0" y="119790"/>
+                  </a:lnTo>
+                  <a:cubicBezTo>
+                    <a:pt x="0" y="88020"/>
+                    <a:pt x="12621" y="57551"/>
+                    <a:pt x="35086" y="35086"/>
+                  </a:cubicBezTo>
+                  <a:cubicBezTo>
+                    <a:pt x="57551" y="12621"/>
+                    <a:pt x="88020" y="0"/>
+                    <a:pt x="119790" y="0"/>
+                  </a:cubicBezTo>
+                  <a:close/>
+                </a:path>
+              </a:pathLst>
+            </a:custGeom>
+            <a:solidFill>
+              <a:srgbClr val="DA7D51"/>
+            </a:solidFill>
+          </p:spPr>
+        </p:sp>
+        <p:sp>
+          <p:nvSpPr>
+            <p:cNvPr name="TextBox 4" id="4"/>
+            <p:cNvSpPr txBox="true"/>
+            <p:nvPr/>
+          </p:nvSpPr>
+          <p:spPr>
+            <a:xfrm>
+              <a:off x="0" y="-38100"/>
+              <a:ext cx="239581" cy="429881"/>
+            </a:xfrm>
+            <a:prstGeom prst="rect">
+              <a:avLst/>
+            </a:prstGeom>
+          </p:spPr>
+          <p:txBody>
+            <a:bodyPr anchor="ctr" rtlCol="false" tIns="50800" lIns="50800" bIns="50800" rIns="50800"/>
+            <a:lstStyle/>
+            <a:p>
+              <a:pPr algn="ctr">
+                <a:lnSpc>
+                  <a:spcPts val="2940"/>
+                </a:lnSpc>
+              </a:pPr>
+            </a:p>
+          </p:txBody>
+        </p:sp>
+      </p:grpSp>
+      <p:sp>
+        <p:nvSpPr>
+          <p:cNvPr name="Freeform 5" id="5"/>
           <p:cNvSpPr/>
           <p:nvPr/>
         </p:nvSpPr>
         <p:spPr>
           <a:xfrm flipH="false" flipV="false" rot="0">
-            <a:off x="14407225" y="2926438"/>
-            <a:ext cx="2852075" cy="1254913"/>
+            <a:off x="16349641" y="575299"/>
+            <a:ext cx="2710550" cy="906802"/>
           </a:xfrm>
           <a:custGeom>
             <a:avLst/>
@@ -8098,18 +8442,18 @@
             <a:cxnLst/>
             <a:rect r="r" b="b" t="t" l="l"/>
             <a:pathLst>
-              <a:path h="1254913" w="2852075">
+              <a:path h="906802" w="2710550">
                 <a:moveTo>
                   <a:pt x="0" y="0"/>
                 </a:moveTo>
                 <a:lnTo>
-                  <a:pt x="2852075" y="0"/>
-                </a:lnTo>
-                <a:lnTo>
-                  <a:pt x="2852075" y="1254913"/>
-                </a:lnTo>
-                <a:lnTo>
-                  <a:pt x="0" y="1254913"/>
+                  <a:pt x="2710550" y="0"/>
+                </a:lnTo>
+                <a:lnTo>
+                  <a:pt x="2710550" y="906802"/>
+                </a:lnTo>
+                <a:lnTo>
+                  <a:pt x="0" y="906802"/>
                 </a:lnTo>
                 <a:lnTo>
                   <a:pt x="0" y="0"/>
@@ -8119,114 +8463,10 @@
             </a:pathLst>
           </a:custGeom>
           <a:blipFill>
-            <a:blip r:embed="rId6">
+            <a:blip r:embed="rId2">
               <a:extLst>
                 <a:ext uri="{96DAC541-7B7A-43D3-8B79-37D633B846F1}">
-                  <asvg:svgBlip xmlns:asvg="http://schemas.microsoft.com/office/drawing/2016/SVG/main" r:embed="rId7"/>
-                </a:ext>
-              </a:extLst>
-            </a:blip>
-            <a:stretch>
-              <a:fillRect l="0" t="0" r="0" b="0"/>
-            </a:stretch>
-          </a:blipFill>
-        </p:spPr>
-      </p:sp>
-      <p:sp>
-        <p:nvSpPr>
-          <p:cNvPr name="Freeform 18" id="18"/>
-          <p:cNvSpPr/>
-          <p:nvPr/>
-        </p:nvSpPr>
-        <p:spPr>
-          <a:xfrm flipH="false" flipV="false" rot="0">
-            <a:off x="789116" y="5383836"/>
-            <a:ext cx="2852075" cy="1254913"/>
-          </a:xfrm>
-          <a:custGeom>
-            <a:avLst/>
-            <a:gdLst/>
-            <a:ahLst/>
-            <a:cxnLst/>
-            <a:rect r="r" b="b" t="t" l="l"/>
-            <a:pathLst>
-              <a:path h="1254913" w="2852075">
-                <a:moveTo>
-                  <a:pt x="0" y="0"/>
-                </a:moveTo>
-                <a:lnTo>
-                  <a:pt x="2852076" y="0"/>
-                </a:lnTo>
-                <a:lnTo>
-                  <a:pt x="2852076" y="1254913"/>
-                </a:lnTo>
-                <a:lnTo>
-                  <a:pt x="0" y="1254913"/>
-                </a:lnTo>
-                <a:lnTo>
-                  <a:pt x="0" y="0"/>
-                </a:lnTo>
-                <a:close/>
-              </a:path>
-            </a:pathLst>
-          </a:custGeom>
-          <a:blipFill>
-            <a:blip r:embed="rId6">
-              <a:extLst>
-                <a:ext uri="{96DAC541-7B7A-43D3-8B79-37D633B846F1}">
-                  <asvg:svgBlip xmlns:asvg="http://schemas.microsoft.com/office/drawing/2016/SVG/main" r:embed="rId7"/>
-                </a:ext>
-              </a:extLst>
-            </a:blip>
-            <a:stretch>
-              <a:fillRect l="0" t="0" r="0" b="0"/>
-            </a:stretch>
-          </a:blipFill>
-        </p:spPr>
-      </p:sp>
-      <p:sp>
-        <p:nvSpPr>
-          <p:cNvPr name="Freeform 19" id="19"/>
-          <p:cNvSpPr/>
-          <p:nvPr/>
-        </p:nvSpPr>
-        <p:spPr>
-          <a:xfrm flipH="false" flipV="false" rot="0">
-            <a:off x="2215154" y="2575547"/>
-            <a:ext cx="763618" cy="1276565"/>
-          </a:xfrm>
-          <a:custGeom>
-            <a:avLst/>
-            <a:gdLst/>
-            <a:ahLst/>
-            <a:cxnLst/>
-            <a:rect r="r" b="b" t="t" l="l"/>
-            <a:pathLst>
-              <a:path h="1276565" w="763618">
-                <a:moveTo>
-                  <a:pt x="0" y="0"/>
-                </a:moveTo>
-                <a:lnTo>
-                  <a:pt x="763618" y="0"/>
-                </a:lnTo>
-                <a:lnTo>
-                  <a:pt x="763618" y="1276565"/>
-                </a:lnTo>
-                <a:lnTo>
-                  <a:pt x="0" y="1276565"/>
-                </a:lnTo>
-                <a:lnTo>
-                  <a:pt x="0" y="0"/>
-                </a:lnTo>
-                <a:close/>
-              </a:path>
-            </a:pathLst>
-          </a:custGeom>
-          <a:blipFill>
-            <a:blip r:embed="rId8">
-              <a:extLst>
-                <a:ext uri="{96DAC541-7B7A-43D3-8B79-37D633B846F1}">
-                  <asvg:svgBlip xmlns:asvg="http://schemas.microsoft.com/office/drawing/2016/SVG/main" r:embed="rId9"/>
+                  <asvg:svgBlip xmlns:asvg="http://schemas.microsoft.com/office/drawing/2016/SVG/main" r:embed="rId3"/>
                 </a:ext>
               </a:extLst>
             </a:blip>
@@ -8241,16 +8481,334 @@
           </a:ln>
         </p:spPr>
       </p:sp>
-      <p:sp>
-        <p:nvSpPr>
-          <p:cNvPr name="Freeform 20" id="20"/>
+      <p:graphicFrame>
+        <p:nvGraphicFramePr>
+          <p:cNvPr name="Object 6" id="6"/>
+          <p:cNvGraphicFramePr/>
+          <p:nvPr/>
+        </p:nvGraphicFramePr>
+        <p:xfrm>
+          <a:off x="834471" y="2000250"/>
+          <a:ext cx="3771900" cy="6286500"/>
+        </p:xfrm>
+        <a:graphic>
+          <a:graphicData uri="http://schemas.openxmlformats.org/presentationml/2006/ole">
+            <p:oleObj imgW="5029200" imgH="7543800" r:id="rId5" progId="Excel.Sheet.12" name="Worksheet">
+              <p:embed/>
+              <p:pic>
+                <p:nvPicPr>
+                  <p:cNvPr name="" id="0"/>
+                  <p:cNvPicPr/>
+                  <p:nvPr/>
+                </p:nvPicPr>
+                <p:blipFill>
+                  <a:blip r:embed="rId4"/>
+                  <a:stretch>
+                    <a:fillRect/>
+                  </a:stretch>
+                </p:blipFill>
+                <p:spPr>
+                  <a:xfrm>
+                    <a:off x="1270000" y="1270000"/>
+                    <a:ext cx="1270000" cy="1270000"/>
+                  </a:xfrm>
+                  <a:prstGeom prst="rect"/>
+                </p:spPr>
+              </p:pic>
+            </p:oleObj>
+          </a:graphicData>
+        </a:graphic>
+      </p:graphicFrame>
+      <p:sp>
+        <p:nvSpPr>
+          <p:cNvPr name="TextBox 7" id="7"/>
+          <p:cNvSpPr txBox="true"/>
+          <p:nvPr/>
+        </p:nvSpPr>
+        <p:spPr>
+          <a:xfrm rot="0">
+            <a:off x="16287702" y="9393452"/>
+            <a:ext cx="1033538" cy="608620"/>
+          </a:xfrm>
+          <a:prstGeom prst="rect">
+            <a:avLst/>
+          </a:prstGeom>
+        </p:spPr>
+        <p:txBody>
+          <a:bodyPr anchor="t" rtlCol="false" tIns="0" lIns="0" bIns="0" rIns="0">
+            <a:spAutoFit/>
+          </a:bodyPr>
+          <a:lstStyle/>
+          <a:p>
+            <a:pPr algn="ctr">
+              <a:lnSpc>
+                <a:spcPts val="4910"/>
+              </a:lnSpc>
+            </a:pPr>
+            <a:r>
+              <a:rPr lang="en-US" sz="3507" b="true">
+                <a:solidFill>
+                  <a:srgbClr val="FFFFFF"/>
+                </a:solidFill>
+                <a:latin typeface="Be Vietnam Ultra-Bold"/>
+                <a:ea typeface="Be Vietnam Ultra-Bold"/>
+                <a:cs typeface="Be Vietnam Ultra-Bold"/>
+                <a:sym typeface="Be Vietnam Ultra-Bold"/>
+              </a:rPr>
+              <a:t>08</a:t>
+            </a:r>
+          </a:p>
+        </p:txBody>
+      </p:sp>
+      <p:sp>
+        <p:nvSpPr>
+          <p:cNvPr name="TextBox 8" id="8"/>
+          <p:cNvSpPr txBox="true"/>
+          <p:nvPr/>
+        </p:nvSpPr>
+        <p:spPr>
+          <a:xfrm rot="0">
+            <a:off x="608897" y="480049"/>
+            <a:ext cx="5340191" cy="887095"/>
+          </a:xfrm>
+          <a:prstGeom prst="rect">
+            <a:avLst/>
+          </a:prstGeom>
+        </p:spPr>
+        <p:txBody>
+          <a:bodyPr anchor="t" rtlCol="false" tIns="0" lIns="0" bIns="0" rIns="0">
+            <a:spAutoFit/>
+          </a:bodyPr>
+          <a:lstStyle/>
+          <a:p>
+            <a:pPr algn="ctr">
+              <a:lnSpc>
+                <a:spcPts val="7279"/>
+              </a:lnSpc>
+            </a:pPr>
+            <a:r>
+              <a:rPr lang="en-US" sz="5199" b="true">
+                <a:solidFill>
+                  <a:srgbClr val="000000"/>
+                </a:solidFill>
+                <a:latin typeface="Canva Sans Bold"/>
+                <a:ea typeface="Canva Sans Bold"/>
+                <a:cs typeface="Canva Sans Bold"/>
+                <a:sym typeface="Canva Sans Bold"/>
+              </a:rPr>
+              <a:t>Algorithms Used</a:t>
+            </a:r>
+          </a:p>
+        </p:txBody>
+      </p:sp>
+    </p:spTree>
+  </p:cSld>
+  <p:clrMapOvr>
+    <a:masterClrMapping/>
+  </p:clrMapOvr>
+</p:sld>
+</file>
+
+<file path=ppt/slides/slide9.xml><?xml version="1.0" encoding="utf-8"?>
+<p:sld xmlns:p="http://schemas.openxmlformats.org/presentationml/2006/main" xmlns:a="http://schemas.openxmlformats.org/drawingml/2006/main" xmlns:r="http://schemas.openxmlformats.org/officeDocument/2006/relationships">
+  <p:cSld>
+    <p:bg>
+      <p:bgPr>
+        <a:solidFill>
+          <a:srgbClr val="FAF2E8"/>
+        </a:solidFill>
+      </p:bgPr>
+    </p:bg>
+    <p:spTree>
+      <p:nvGrpSpPr>
+        <p:cNvPr id="1" name=""/>
+        <p:cNvGrpSpPr/>
+        <p:nvPr/>
+      </p:nvGrpSpPr>
+      <p:grpSpPr>
+        <a:xfrm>
+          <a:off x="0" y="0"/>
+          <a:ext cx="0" cy="0"/>
+          <a:chOff x="0" y="0"/>
+          <a:chExt cx="0" cy="0"/>
+        </a:xfrm>
+      </p:grpSpPr>
+      <p:grpSp>
+        <p:nvGrpSpPr>
+          <p:cNvPr name="Group 2" id="2"/>
+          <p:cNvGrpSpPr/>
+          <p:nvPr/>
+        </p:nvGrpSpPr>
+        <p:grpSpPr>
+          <a:xfrm rot="0">
+            <a:off x="16349641" y="9258300"/>
+            <a:ext cx="909659" cy="1487543"/>
+            <a:chOff x="0" y="0"/>
+            <a:chExt cx="239581" cy="391781"/>
+          </a:xfrm>
+        </p:grpSpPr>
+        <p:sp>
+          <p:nvSpPr>
+            <p:cNvPr name="Freeform 3" id="3"/>
+            <p:cNvSpPr/>
+            <p:nvPr/>
+          </p:nvSpPr>
+          <p:spPr>
+            <a:xfrm flipH="false" flipV="false" rot="0">
+              <a:off x="0" y="0"/>
+              <a:ext cx="239581" cy="391781"/>
+            </a:xfrm>
+            <a:custGeom>
+              <a:avLst/>
+              <a:gdLst/>
+              <a:ahLst/>
+              <a:cxnLst/>
+              <a:rect r="r" b="b" t="t" l="l"/>
+              <a:pathLst>
+                <a:path h="391781" w="239581">
+                  <a:moveTo>
+                    <a:pt x="119790" y="0"/>
+                  </a:moveTo>
+                  <a:lnTo>
+                    <a:pt x="119790" y="0"/>
+                  </a:lnTo>
+                  <a:cubicBezTo>
+                    <a:pt x="151561" y="0"/>
+                    <a:pt x="182030" y="12621"/>
+                    <a:pt x="204495" y="35086"/>
+                  </a:cubicBezTo>
+                  <a:cubicBezTo>
+                    <a:pt x="226960" y="57551"/>
+                    <a:pt x="239581" y="88020"/>
+                    <a:pt x="239581" y="119790"/>
+                  </a:cubicBezTo>
+                  <a:lnTo>
+                    <a:pt x="239581" y="271990"/>
+                  </a:lnTo>
+                  <a:cubicBezTo>
+                    <a:pt x="239581" y="303761"/>
+                    <a:pt x="226960" y="334230"/>
+                    <a:pt x="204495" y="356695"/>
+                  </a:cubicBezTo>
+                  <a:cubicBezTo>
+                    <a:pt x="182030" y="379160"/>
+                    <a:pt x="151561" y="391781"/>
+                    <a:pt x="119790" y="391781"/>
+                  </a:cubicBezTo>
+                  <a:lnTo>
+                    <a:pt x="119790" y="391781"/>
+                  </a:lnTo>
+                  <a:cubicBezTo>
+                    <a:pt x="88020" y="391781"/>
+                    <a:pt x="57551" y="379160"/>
+                    <a:pt x="35086" y="356695"/>
+                  </a:cubicBezTo>
+                  <a:cubicBezTo>
+                    <a:pt x="12621" y="334230"/>
+                    <a:pt x="0" y="303761"/>
+                    <a:pt x="0" y="271990"/>
+                  </a:cubicBezTo>
+                  <a:lnTo>
+                    <a:pt x="0" y="119790"/>
+                  </a:lnTo>
+                  <a:cubicBezTo>
+                    <a:pt x="0" y="88020"/>
+                    <a:pt x="12621" y="57551"/>
+                    <a:pt x="35086" y="35086"/>
+                  </a:cubicBezTo>
+                  <a:cubicBezTo>
+                    <a:pt x="57551" y="12621"/>
+                    <a:pt x="88020" y="0"/>
+                    <a:pt x="119790" y="0"/>
+                  </a:cubicBezTo>
+                  <a:close/>
+                </a:path>
+              </a:pathLst>
+            </a:custGeom>
+            <a:solidFill>
+              <a:srgbClr val="DA7D51"/>
+            </a:solidFill>
+          </p:spPr>
+        </p:sp>
+        <p:sp>
+          <p:nvSpPr>
+            <p:cNvPr name="TextBox 4" id="4"/>
+            <p:cNvSpPr txBox="true"/>
+            <p:nvPr/>
+          </p:nvSpPr>
+          <p:spPr>
+            <a:xfrm>
+              <a:off x="0" y="-38100"/>
+              <a:ext cx="239581" cy="429881"/>
+            </a:xfrm>
+            <a:prstGeom prst="rect">
+              <a:avLst/>
+            </a:prstGeom>
+          </p:spPr>
+          <p:txBody>
+            <a:bodyPr anchor="ctr" rtlCol="false" tIns="50800" lIns="50800" bIns="50800" rIns="50800"/>
+            <a:lstStyle/>
+            <a:p>
+              <a:pPr algn="ctr">
+                <a:lnSpc>
+                  <a:spcPts val="2940"/>
+                </a:lnSpc>
+              </a:pPr>
+            </a:p>
+          </p:txBody>
+        </p:sp>
+      </p:grpSp>
+      <p:sp>
+        <p:nvSpPr>
+          <p:cNvPr name="TextBox 5" id="5"/>
+          <p:cNvSpPr txBox="true"/>
+          <p:nvPr/>
+        </p:nvSpPr>
+        <p:spPr>
+          <a:xfrm rot="0">
+            <a:off x="4639648" y="318489"/>
+            <a:ext cx="6815961" cy="1277547"/>
+          </a:xfrm>
+          <a:prstGeom prst="rect">
+            <a:avLst/>
+          </a:prstGeom>
+        </p:spPr>
+        <p:txBody>
+          <a:bodyPr anchor="t" rtlCol="false" tIns="0" lIns="0" bIns="0" rIns="0">
+            <a:spAutoFit/>
+          </a:bodyPr>
+          <a:lstStyle/>
+          <a:p>
+            <a:pPr algn="l">
+              <a:lnSpc>
+                <a:spcPts val="10434"/>
+              </a:lnSpc>
+            </a:pPr>
+            <a:r>
+              <a:rPr lang="en-US" sz="7452" b="true">
+                <a:solidFill>
+                  <a:srgbClr val="000000"/>
+                </a:solidFill>
+                <a:latin typeface="Be Vietnam Ultra-Bold"/>
+                <a:ea typeface="Be Vietnam Ultra-Bold"/>
+                <a:cs typeface="Be Vietnam Ultra-Bold"/>
+                <a:sym typeface="Be Vietnam Ultra-Bold"/>
+              </a:rPr>
+              <a:t>Conclusion</a:t>
+            </a:r>
+          </a:p>
+        </p:txBody>
+      </p:sp>
+      <p:sp>
+        <p:nvSpPr>
+          <p:cNvPr name="Freeform 6" id="6"/>
           <p:cNvSpPr/>
           <p:nvPr/>
         </p:nvSpPr>
         <p:spPr>
           <a:xfrm flipH="false" flipV="false" rot="0">
-            <a:off x="15586023" y="6834559"/>
-            <a:ext cx="763618" cy="1276565"/>
+            <a:off x="16349641" y="575299"/>
+            <a:ext cx="2710550" cy="906802"/>
           </a:xfrm>
           <a:custGeom>
             <a:avLst/>
@@ -8259,18 +8817,18 @@
             <a:cxnLst/>
             <a:rect r="r" b="b" t="t" l="l"/>
             <a:pathLst>
-              <a:path h="1276565" w="763618">
+              <a:path h="906802" w="2710550">
                 <a:moveTo>
                   <a:pt x="0" y="0"/>
                 </a:moveTo>
                 <a:lnTo>
-                  <a:pt x="763618" y="0"/>
-                </a:lnTo>
-                <a:lnTo>
-                  <a:pt x="763618" y="1276564"/>
-                </a:lnTo>
-                <a:lnTo>
-                  <a:pt x="0" y="1276564"/>
+                  <a:pt x="2710550" y="0"/>
+                </a:lnTo>
+                <a:lnTo>
+                  <a:pt x="2710550" y="906802"/>
+                </a:lnTo>
+                <a:lnTo>
+                  <a:pt x="0" y="906802"/>
                 </a:lnTo>
                 <a:lnTo>
                   <a:pt x="0" y="0"/>
@@ -8280,10 +8838,10 @@
             </a:pathLst>
           </a:custGeom>
           <a:blipFill>
-            <a:blip r:embed="rId8">
+            <a:blip r:embed="rId2">
               <a:extLst>
                 <a:ext uri="{96DAC541-7B7A-43D3-8B79-37D633B846F1}">
-                  <asvg:svgBlip xmlns:asvg="http://schemas.microsoft.com/office/drawing/2016/SVG/main" r:embed="rId9"/>
+                  <asvg:svgBlip xmlns:asvg="http://schemas.microsoft.com/office/drawing/2016/SVG/main" r:embed="rId3"/>
                 </a:ext>
               </a:extLst>
             </a:blip>
@@ -8297,6 +8855,239 @@
             <a:miter/>
           </a:ln>
         </p:spPr>
+      </p:sp>
+      <p:sp>
+        <p:nvSpPr>
+          <p:cNvPr name="TextBox 7" id="7"/>
+          <p:cNvSpPr txBox="true"/>
+          <p:nvPr/>
+        </p:nvSpPr>
+        <p:spPr>
+          <a:xfrm rot="0">
+            <a:off x="16287702" y="9393452"/>
+            <a:ext cx="1033538" cy="608620"/>
+          </a:xfrm>
+          <a:prstGeom prst="rect">
+            <a:avLst/>
+          </a:prstGeom>
+        </p:spPr>
+        <p:txBody>
+          <a:bodyPr anchor="t" rtlCol="false" tIns="0" lIns="0" bIns="0" rIns="0">
+            <a:spAutoFit/>
+          </a:bodyPr>
+          <a:lstStyle/>
+          <a:p>
+            <a:pPr algn="ctr">
+              <a:lnSpc>
+                <a:spcPts val="4910"/>
+              </a:lnSpc>
+            </a:pPr>
+            <a:r>
+              <a:rPr lang="en-US" sz="3507" b="true">
+                <a:solidFill>
+                  <a:srgbClr val="FFFFFF"/>
+                </a:solidFill>
+                <a:latin typeface="Be Vietnam Ultra-Bold"/>
+                <a:ea typeface="Be Vietnam Ultra-Bold"/>
+                <a:cs typeface="Be Vietnam Ultra-Bold"/>
+                <a:sym typeface="Be Vietnam Ultra-Bold"/>
+              </a:rPr>
+              <a:t>09</a:t>
+            </a:r>
+          </a:p>
+        </p:txBody>
+      </p:sp>
+      <p:sp>
+        <p:nvSpPr>
+          <p:cNvPr name="TextBox 8" id="8"/>
+          <p:cNvSpPr txBox="true"/>
+          <p:nvPr/>
+        </p:nvSpPr>
+        <p:spPr>
+          <a:xfrm rot="0">
+            <a:off x="1028700" y="2336197"/>
+            <a:ext cx="15259002" cy="7133455"/>
+          </a:xfrm>
+          <a:prstGeom prst="rect">
+            <a:avLst/>
+          </a:prstGeom>
+        </p:spPr>
+        <p:txBody>
+          <a:bodyPr anchor="t" rtlCol="false" tIns="0" lIns="0" bIns="0" rIns="0">
+            <a:spAutoFit/>
+          </a:bodyPr>
+          <a:lstStyle/>
+          <a:p>
+            <a:pPr algn="l">
+              <a:lnSpc>
+                <a:spcPts val="5162"/>
+              </a:lnSpc>
+              <a:spcBef>
+                <a:spcPct val="0"/>
+              </a:spcBef>
+            </a:pPr>
+            <a:r>
+              <a:rPr lang="en-US" b="true" sz="3687">
+                <a:solidFill>
+                  <a:srgbClr val="000000"/>
+                </a:solidFill>
+                <a:latin typeface="Be Vietnam Ultra-Bold"/>
+                <a:ea typeface="Be Vietnam Ultra-Bold"/>
+                <a:cs typeface="Be Vietnam Ultra-Bold"/>
+                <a:sym typeface="Be Vietnam Ultra-Bold"/>
+              </a:rPr>
+              <a:t>Efficient Route Planning:</a:t>
+            </a:r>
+            <a:r>
+              <a:rPr lang="en-US" sz="3687">
+                <a:solidFill>
+                  <a:srgbClr val="000000"/>
+                </a:solidFill>
+                <a:latin typeface="Be Vietnam"/>
+                <a:ea typeface="Be Vietnam"/>
+                <a:cs typeface="Be Vietnam"/>
+                <a:sym typeface="Be Vietnam"/>
+              </a:rPr>
+              <a:t> Uses Bitmask Dynamic Programming to find the shortest picking route for selected products.</a:t>
+            </a:r>
+          </a:p>
+          <a:p>
+            <a:pPr algn="l">
+              <a:lnSpc>
+                <a:spcPts val="5162"/>
+              </a:lnSpc>
+              <a:spcBef>
+                <a:spcPct val="0"/>
+              </a:spcBef>
+            </a:pPr>
+            <a:r>
+              <a:rPr lang="en-US" b="true" sz="3687">
+                <a:solidFill>
+                  <a:srgbClr val="000000"/>
+                </a:solidFill>
+                <a:latin typeface="Be Vietnam Ultra-Bold"/>
+                <a:ea typeface="Be Vietnam Ultra-Bold"/>
+                <a:cs typeface="Be Vietnam Ultra-Bold"/>
+                <a:sym typeface="Be Vietnam Ultra-Bold"/>
+              </a:rPr>
+              <a:t>Algorithm Comparison:</a:t>
+            </a:r>
+            <a:r>
+              <a:rPr lang="en-US" sz="3687">
+                <a:solidFill>
+                  <a:srgbClr val="000000"/>
+                </a:solidFill>
+                <a:latin typeface="Be Vietnam"/>
+                <a:ea typeface="Be Vietnam"/>
+                <a:cs typeface="Be Vietnam"/>
+                <a:sym typeface="Be Vietnam"/>
+              </a:rPr>
+              <a:t> Compares the exact solution with the faster Nearest </a:t>
+            </a:r>
+            <a:r>
+              <a:rPr lang="en-US" b="true" sz="3687">
+                <a:solidFill>
+                  <a:srgbClr val="000000"/>
+                </a:solidFill>
+                <a:latin typeface="Be Vietnam Ultra-Bold"/>
+                <a:ea typeface="Be Vietnam Ultra-Bold"/>
+                <a:cs typeface="Be Vietnam Ultra-Bold"/>
+                <a:sym typeface="Be Vietnam Ultra-Bold"/>
+              </a:rPr>
+              <a:t>Neighbour heuristic.</a:t>
+            </a:r>
+          </a:p>
+          <a:p>
+            <a:pPr algn="l">
+              <a:lnSpc>
+                <a:spcPts val="5162"/>
+              </a:lnSpc>
+              <a:spcBef>
+                <a:spcPct val="0"/>
+              </a:spcBef>
+            </a:pPr>
+            <a:r>
+              <a:rPr lang="en-US" b="true" sz="3687">
+                <a:solidFill>
+                  <a:srgbClr val="000000"/>
+                </a:solidFill>
+                <a:latin typeface="Be Vietnam Ultra-Bold"/>
+                <a:ea typeface="Be Vietnam Ultra-Bold"/>
+                <a:cs typeface="Be Vietnam Ultra-Bold"/>
+                <a:sym typeface="Be Vietnam Ultra-Bold"/>
+              </a:rPr>
+              <a:t>Advanced Algorithm Integration:</a:t>
+            </a:r>
+            <a:r>
+              <a:rPr lang="en-US" sz="3687">
+                <a:solidFill>
+                  <a:srgbClr val="000000"/>
+                </a:solidFill>
+                <a:latin typeface="Be Vietnam"/>
+                <a:ea typeface="Be Vietnam"/>
+                <a:cs typeface="Be Vietnam"/>
+                <a:sym typeface="Be Vietnam"/>
+              </a:rPr>
+              <a:t> Demonstrates string matching, network flow, randomized hashing, reservoir sampling and frequency analysis.</a:t>
+            </a:r>
+          </a:p>
+          <a:p>
+            <a:pPr algn="l">
+              <a:lnSpc>
+                <a:spcPts val="5162"/>
+              </a:lnSpc>
+              <a:spcBef>
+                <a:spcPct val="0"/>
+              </a:spcBef>
+            </a:pPr>
+            <a:r>
+              <a:rPr lang="en-US" b="true" sz="3687">
+                <a:solidFill>
+                  <a:srgbClr val="000000"/>
+                </a:solidFill>
+                <a:latin typeface="Be Vietnam Ultra-Bold"/>
+                <a:ea typeface="Be Vietnam Ultra-Bold"/>
+                <a:cs typeface="Be Vietnam Ultra-Bold"/>
+                <a:sym typeface="Be Vietnam Ultra-Bold"/>
+              </a:rPr>
+              <a:t>Visual Results:</a:t>
+            </a:r>
+            <a:r>
+              <a:rPr lang="en-US" sz="3687">
+                <a:solidFill>
+                  <a:srgbClr val="000000"/>
+                </a:solidFill>
+                <a:latin typeface="Be Vietnam"/>
+                <a:ea typeface="Be Vietnam"/>
+                <a:cs typeface="Be Vietnam"/>
+                <a:sym typeface="Be Vietnam"/>
+              </a:rPr>
+              <a:t> Displays warehouse locations, picking sequences, route distances and estimated savings.</a:t>
+            </a:r>
+          </a:p>
+          <a:p>
+            <a:pPr algn="l">
+              <a:lnSpc>
+                <a:spcPts val="5162"/>
+              </a:lnSpc>
+              <a:spcBef>
+                <a:spcPct val="0"/>
+              </a:spcBef>
+            </a:pPr>
+            <a:r>
+              <a:rPr lang="en-US" sz="3687">
+                <a:solidFill>
+                  <a:srgbClr val="000000"/>
+                </a:solidFill>
+                <a:latin typeface="Be Vietnam"/>
+                <a:ea typeface="Be Vietnam"/>
+                <a:cs typeface="Be Vietnam"/>
+                <a:sym typeface="Be Vietnam"/>
+              </a:rPr>
+              <a:t>Future Scope: Can be extended with dynamic shelf allocation, obstacle-aware routing and real-time warehouse data.</a:t>
+            </a:r>
+          </a:p>
+        </p:txBody>
       </p:sp>
     </p:spTree>
   </p:cSld>
